--- a/slides/composite_matern.pptx
+++ b/slides/composite_matern.pptx
@@ -17,6 +17,10 @@
     <p:sldId id="265" r:id="rId16"/>
     <p:sldId id="266" r:id="rId17"/>
     <p:sldId id="267" r:id="rId18"/>
+    <p:sldId id="268" r:id="rId19"/>
+    <p:sldId id="269" r:id="rId20"/>
+    <p:sldId id="270" r:id="rId21"/>
+    <p:sldId id="271" r:id="rId22"/>
   </p:sldIdLst>
   <p:sldSz cx="12191695" cy="6858000" type="screen4x3"/>
   <p:notesSz cx="6858000" cy="9144000"/>
@@ -4366,6 +4370,1947 @@
                   <a:srgbClr val="1F3857"/>
                 </a:solidFill>
               </a:rPr>
+              <a:t>The same maps, as one of two objectives</a:t>
+            </a:r>
+          </a:p>
+        </p:txBody>
+      </p:sp>
+      <p:sp>
+        <p:nvSpPr>
+          <p:cNvPr id="3" name="TextBox 2"/>
+          <p:cNvSpPr txBox="1"/>
+          <p:nvPr/>
+        </p:nvSpPr>
+        <p:spPr>
+          <a:xfrm>
+            <a:off x="502920" y="960120"/>
+            <a:ext cx="11155680" cy="457200"/>
+          </a:xfrm>
+          <a:prstGeom prst="rect">
+            <a:avLst/>
+          </a:prstGeom>
+          <a:noFill/>
+        </p:spPr>
+        <p:txBody>
+          <a:bodyPr wrap="square">
+            <a:spAutoFit/>
+          </a:bodyPr>
+          <a:lstStyle/>
+          <a:p>
+            <a:pPr algn="l"/>
+            <a:r>
+              <a:rPr sz="1500" b="0">
+                <a:solidFill>
+                  <a:srgbClr val="555F6B"/>
+                </a:solidFill>
+              </a:rPr>
+              <a:t>f₁ = g₁(h₁),  f₂ = h₂  — measured by hypervolume</a:t>
+            </a:r>
+          </a:p>
+        </p:txBody>
+      </p:sp>
+      <p:sp>
+        <p:nvSpPr>
+          <p:cNvPr id="4" name="TextBox 3"/>
+          <p:cNvSpPr txBox="1"/>
+          <p:nvPr/>
+        </p:nvSpPr>
+        <p:spPr>
+          <a:xfrm>
+            <a:off x="685800" y="1737360"/>
+            <a:ext cx="10789920" cy="457200"/>
+          </a:xfrm>
+          <a:prstGeom prst="rect">
+            <a:avLst/>
+          </a:prstGeom>
+          <a:noFill/>
+        </p:spPr>
+        <p:txBody>
+          <a:bodyPr wrap="square">
+            <a:spAutoFit/>
+          </a:bodyPr>
+          <a:lstStyle/>
+          <a:p>
+            <a:pPr algn="l"/>
+            <a:r>
+              <a:rPr sz="1800" b="0">
+                <a:solidFill>
+                  <a:srgbClr val="555F6B"/>
+                </a:solidFill>
+              </a:rPr>
+              <a:t>•  Objective 2 is the identity, so both arms model it with the same GP and every difference has to come from g₁ — the same isolation the single-objective design uses.</a:t>
+            </a:r>
+          </a:p>
+        </p:txBody>
+      </p:sp>
+      <p:sp>
+        <p:nvSpPr>
+          <p:cNvPr id="5" name="TextBox 4"/>
+          <p:cNvSpPr txBox="1"/>
+          <p:nvPr/>
+        </p:nvSpPr>
+        <p:spPr>
+          <a:xfrm>
+            <a:off x="685800" y="2514600"/>
+            <a:ext cx="10789920" cy="457200"/>
+          </a:xfrm>
+          <a:prstGeom prst="rect">
+            <a:avLst/>
+          </a:prstGeom>
+          <a:noFill/>
+        </p:spPr>
+        <p:txBody>
+          <a:bodyPr wrap="square">
+            <a:spAutoFit/>
+          </a:bodyPr>
+          <a:lstStyle/>
+          <a:p>
+            <a:pPr algn="l"/>
+            <a:r>
+              <a:rPr sz="1800" b="0">
+                <a:solidFill>
+                  <a:srgbClr val="555F6B"/>
+                </a:solidFill>
+              </a:rPr>
+              <a:t>•  21 maps × 4 draws × 5 designs. 17 of the 21 are the SAME functions measured single-objective, verified identical to machine precision.</a:t>
+            </a:r>
+          </a:p>
+        </p:txBody>
+      </p:sp>
+      <p:sp>
+        <p:nvSpPr>
+          <p:cNvPr id="6" name="TextBox 5"/>
+          <p:cNvSpPr txBox="1"/>
+          <p:nvPr/>
+        </p:nvSpPr>
+        <p:spPr>
+          <a:xfrm>
+            <a:off x="685800" y="3291839"/>
+            <a:ext cx="10789920" cy="457200"/>
+          </a:xfrm>
+          <a:prstGeom prst="rect">
+            <a:avLst/>
+          </a:prstGeom>
+          <a:noFill/>
+        </p:spPr>
+        <p:txBody>
+          <a:bodyPr wrap="square">
+            <a:spAutoFit/>
+          </a:bodyPr>
+          <a:lstStyle/>
+          <a:p>
+            <a:pPr algn="l"/>
+            <a:r>
+              <a:rPr sz="1800" b="1">
+                <a:solidFill>
+                  <a:srgbClr val="1F3857"/>
+                </a:solidFill>
+              </a:rPr>
+              <a:t>•  So the two settings can be compared map by map.</a:t>
+            </a:r>
+          </a:p>
+        </p:txBody>
+      </p:sp>
+    </p:spTree>
+  </p:cSld>
+  <p:clrMapOvr>
+    <a:masterClrMapping/>
+  </p:clrMapOvr>
+</p:sld>
+</file>
+
+<file path=ppt/slides/slide13.xml><?xml version="1.0" encoding="utf-8"?>
+<p:sld xmlns:a="http://schemas.openxmlformats.org/drawingml/2006/main" xmlns:p="http://schemas.openxmlformats.org/presentationml/2006/main" xmlns:r="http://schemas.openxmlformats.org/officeDocument/2006/relationships">
+  <p:cSld>
+    <p:spTree>
+      <p:nvGrpSpPr>
+        <p:cNvPr id="1" name=""/>
+        <p:cNvGrpSpPr/>
+        <p:nvPr/>
+      </p:nvGrpSpPr>
+      <p:grpSpPr/>
+      <p:sp>
+        <p:nvSpPr>
+          <p:cNvPr id="2" name="TextBox 1"/>
+          <p:cNvSpPr txBox="1"/>
+          <p:nvPr/>
+        </p:nvSpPr>
+        <p:spPr>
+          <a:xfrm>
+            <a:off x="502920" y="274320"/>
+            <a:ext cx="11155680" cy="731520"/>
+          </a:xfrm>
+          <a:prstGeom prst="rect">
+            <a:avLst/>
+          </a:prstGeom>
+          <a:noFill/>
+        </p:spPr>
+        <p:txBody>
+          <a:bodyPr wrap="square">
+            <a:spAutoFit/>
+          </a:bodyPr>
+          <a:lstStyle/>
+          <a:p>
+            <a:pPr algn="l"/>
+            <a:r>
+              <a:rPr sz="3000" b="1">
+                <a:solidFill>
+                  <a:srgbClr val="1F3857"/>
+                </a:solidFill>
+              </a:rPr>
+              <a:t>Two-objective results</a:t>
+            </a:r>
+          </a:p>
+        </p:txBody>
+      </p:sp>
+      <p:sp>
+        <p:nvSpPr>
+          <p:cNvPr id="3" name="TextBox 2"/>
+          <p:cNvSpPr txBox="1"/>
+          <p:nvPr/>
+        </p:nvSpPr>
+        <p:spPr>
+          <a:xfrm>
+            <a:off x="502920" y="960120"/>
+            <a:ext cx="11155680" cy="457200"/>
+          </a:xfrm>
+          <a:prstGeom prst="rect">
+            <a:avLst/>
+          </a:prstGeom>
+          <a:noFill/>
+        </p:spPr>
+        <p:txBody>
+          <a:bodyPr wrap="square">
+            <a:spAutoFit/>
+          </a:bodyPr>
+          <a:lstStyle/>
+          <a:p>
+            <a:pPr algn="l"/>
+            <a:r>
+              <a:rPr sz="1500" b="0">
+                <a:solidFill>
+                  <a:srgbClr val="555F6B"/>
+                </a:solidFill>
+              </a:rPr>
+              <a:t>top 10 of 21 by gain</a:t>
+            </a:r>
+          </a:p>
+        </p:txBody>
+      </p:sp>
+      <p:graphicFrame>
+        <p:nvGraphicFramePr>
+          <p:cNvPr id="4" name="Table 3"/>
+          <p:cNvGraphicFramePr>
+            <a:graphicFrameLocks noGrp="1"/>
+          </p:cNvGraphicFramePr>
+          <p:nvPr/>
+        </p:nvGraphicFramePr>
+        <p:xfrm>
+          <a:off x="1645920" y="1737360"/>
+          <a:ext cx="8869680" cy="3840480"/>
+        </p:xfrm>
+        <a:graphic>
+          <a:graphicData uri="http://schemas.openxmlformats.org/drawingml/2006/table">
+            <a:tbl>
+              <a:tblPr firstRow="1" bandRow="1">
+                <a:tableStyleId>{5C22544A-7EE6-4342-B048-85BDC9FD1C3A}</a:tableStyleId>
+              </a:tblPr>
+              <a:tblGrid>
+                <a:gridCol w="2217420"/>
+                <a:gridCol w="2217420"/>
+                <a:gridCol w="2217420"/>
+                <a:gridCol w="2217420"/>
+              </a:tblGrid>
+              <a:tr h="349134">
+                <a:tc>
+                  <a:txBody>
+                    <a:bodyPr/>
+                    <a:lstStyle/>
+                    <a:p>
+                      <a:pPr algn="l"/>
+                      <a:r>
+                        <a:rPr sz="1400" b="1">
+                          <a:solidFill>
+                            <a:srgbClr val="FFFFFF"/>
+                          </a:solidFill>
+                        </a:rPr>
+                        <a:t>Problem</a:t>
+                      </a:r>
+                    </a:p>
+                  </a:txBody>
+                  <a:tcPr marT="18000" marB="18000"/>
+                </a:tc>
+                <a:tc>
+                  <a:txBody>
+                    <a:bodyPr/>
+                    <a:lstStyle/>
+                    <a:p>
+                      <a:pPr algn="l"/>
+                      <a:r>
+                        <a:rPr sz="1400" b="1">
+                          <a:solidFill>
+                            <a:srgbClr val="FFFFFF"/>
+                          </a:solidFill>
+                        </a:rPr>
+                        <a:t>Bijective?</a:t>
+                      </a:r>
+                    </a:p>
+                  </a:txBody>
+                  <a:tcPr marT="18000" marB="18000"/>
+                </a:tc>
+                <a:tc>
+                  <a:txBody>
+                    <a:bodyPr/>
+                    <a:lstStyle/>
+                    <a:p>
+                      <a:pPr algn="l"/>
+                      <a:r>
+                        <a:rPr sz="1400" b="1">
+                          <a:solidFill>
+                            <a:srgbClr val="FFFFFF"/>
+                          </a:solidFill>
+                        </a:rPr>
+                        <a:t>HV gain %</a:t>
+                      </a:r>
+                    </a:p>
+                  </a:txBody>
+                  <a:tcPr marT="18000" marB="18000"/>
+                </a:tc>
+                <a:tc>
+                  <a:txBody>
+                    <a:bodyPr/>
+                    <a:lstStyle/>
+                    <a:p>
+                      <a:pPr algn="l"/>
+                      <a:r>
+                        <a:rPr sz="1400" b="1">
+                          <a:solidFill>
+                            <a:srgbClr val="FFFFFF"/>
+                          </a:solidFill>
+                        </a:rPr>
+                        <a:t>p</a:t>
+                      </a:r>
+                    </a:p>
+                  </a:txBody>
+                  <a:tcPr marT="18000" marB="18000"/>
+                </a:tc>
+              </a:tr>
+              <a:tr h="349134">
+                <a:tc>
+                  <a:txBody>
+                    <a:bodyPr/>
+                    <a:lstStyle/>
+                    <a:p>
+                      <a:pPr algn="l"/>
+                      <a:r>
+                        <a:rPr sz="1400" b="0">
+                          <a:solidFill>
+                            <a:srgbClr val="1F3857"/>
+                          </a:solidFill>
+                        </a:rPr>
+                        <a:t>root5</a:t>
+                      </a:r>
+                    </a:p>
+                  </a:txBody>
+                  <a:tcPr marT="18000" marB="18000"/>
+                </a:tc>
+                <a:tc>
+                  <a:txBody>
+                    <a:bodyPr/>
+                    <a:lstStyle/>
+                    <a:p>
+                      <a:pPr algn="l"/>
+                      <a:r>
+                        <a:rPr sz="1400" b="0">
+                          <a:solidFill>
+                            <a:srgbClr val="1F3857"/>
+                          </a:solidFill>
+                        </a:rPr>
+                        <a:t>no</a:t>
+                      </a:r>
+                    </a:p>
+                  </a:txBody>
+                  <a:tcPr marT="18000" marB="18000"/>
+                </a:tc>
+                <a:tc>
+                  <a:txBody>
+                    <a:bodyPr/>
+                    <a:lstStyle/>
+                    <a:p>
+                      <a:pPr algn="r"/>
+                      <a:r>
+                        <a:rPr sz="1400" b="0">
+                          <a:solidFill>
+                            <a:srgbClr val="1F3857"/>
+                          </a:solidFill>
+                        </a:rPr>
+                        <a:t>+31.24</a:t>
+                      </a:r>
+                    </a:p>
+                  </a:txBody>
+                  <a:tcPr marT="18000" marB="18000"/>
+                </a:tc>
+                <a:tc>
+                  <a:txBody>
+                    <a:bodyPr/>
+                    <a:lstStyle/>
+                    <a:p>
+                      <a:pPr algn="r"/>
+                      <a:r>
+                        <a:rPr sz="1400" b="0">
+                          <a:solidFill>
+                            <a:srgbClr val="1F3857"/>
+                          </a:solidFill>
+                        </a:rPr>
+                        <a:t>0.013</a:t>
+                      </a:r>
+                    </a:p>
+                  </a:txBody>
+                  <a:tcPr marT="18000" marB="18000"/>
+                </a:tc>
+              </a:tr>
+              <a:tr h="349134">
+                <a:tc>
+                  <a:txBody>
+                    <a:bodyPr/>
+                    <a:lstStyle/>
+                    <a:p>
+                      <a:pPr algn="l"/>
+                      <a:r>
+                        <a:rPr sz="1400" b="0">
+                          <a:solidFill>
+                            <a:srgbClr val="1F3857"/>
+                          </a:solidFill>
+                        </a:rPr>
+                        <a:t>root3</a:t>
+                      </a:r>
+                    </a:p>
+                  </a:txBody>
+                  <a:tcPr marT="18000" marB="18000"/>
+                </a:tc>
+                <a:tc>
+                  <a:txBody>
+                    <a:bodyPr/>
+                    <a:lstStyle/>
+                    <a:p>
+                      <a:pPr algn="l"/>
+                      <a:r>
+                        <a:rPr sz="1400" b="0">
+                          <a:solidFill>
+                            <a:srgbClr val="1F3857"/>
+                          </a:solidFill>
+                        </a:rPr>
+                        <a:t>no</a:t>
+                      </a:r>
+                    </a:p>
+                  </a:txBody>
+                  <a:tcPr marT="18000" marB="18000"/>
+                </a:tc>
+                <a:tc>
+                  <a:txBody>
+                    <a:bodyPr/>
+                    <a:lstStyle/>
+                    <a:p>
+                      <a:pPr algn="r"/>
+                      <a:r>
+                        <a:rPr sz="1400" b="0">
+                          <a:solidFill>
+                            <a:srgbClr val="1F3857"/>
+                          </a:solidFill>
+                        </a:rPr>
+                        <a:t>+5.28</a:t>
+                      </a:r>
+                    </a:p>
+                  </a:txBody>
+                  <a:tcPr marT="18000" marB="18000"/>
+                </a:tc>
+                <a:tc>
+                  <a:txBody>
+                    <a:bodyPr/>
+                    <a:lstStyle/>
+                    <a:p>
+                      <a:pPr algn="r"/>
+                      <a:r>
+                        <a:rPr sz="1400" b="0">
+                          <a:solidFill>
+                            <a:srgbClr val="1F3857"/>
+                          </a:solidFill>
+                        </a:rPr>
+                        <a:t>0.024</a:t>
+                      </a:r>
+                    </a:p>
+                  </a:txBody>
+                  <a:tcPr marT="18000" marB="18000"/>
+                </a:tc>
+              </a:tr>
+              <a:tr h="349134">
+                <a:tc>
+                  <a:txBody>
+                    <a:bodyPr/>
+                    <a:lstStyle/>
+                    <a:p>
+                      <a:pPr algn="l"/>
+                      <a:r>
+                        <a:rPr sz="1400" b="0">
+                          <a:solidFill>
+                            <a:srgbClr val="1F3857"/>
+                          </a:solidFill>
+                        </a:rPr>
+                        <a:t>spr2s050</a:t>
+                      </a:r>
+                    </a:p>
+                  </a:txBody>
+                  <a:tcPr marT="18000" marB="18000"/>
+                </a:tc>
+                <a:tc>
+                  <a:txBody>
+                    <a:bodyPr/>
+                    <a:lstStyle/>
+                    <a:p>
+                      <a:pPr algn="l"/>
+                      <a:r>
+                        <a:rPr sz="1400" b="0">
+                          <a:solidFill>
+                            <a:srgbClr val="1F3857"/>
+                          </a:solidFill>
+                        </a:rPr>
+                        <a:t>no</a:t>
+                      </a:r>
+                    </a:p>
+                  </a:txBody>
+                  <a:tcPr marT="18000" marB="18000"/>
+                </a:tc>
+                <a:tc>
+                  <a:txBody>
+                    <a:bodyPr/>
+                    <a:lstStyle/>
+                    <a:p>
+                      <a:pPr algn="r"/>
+                      <a:r>
+                        <a:rPr sz="1400" b="0">
+                          <a:solidFill>
+                            <a:srgbClr val="1F3857"/>
+                          </a:solidFill>
+                        </a:rPr>
+                        <a:t>+4.15</a:t>
+                      </a:r>
+                    </a:p>
+                  </a:txBody>
+                  <a:tcPr marT="18000" marB="18000"/>
+                </a:tc>
+                <a:tc>
+                  <a:txBody>
+                    <a:bodyPr/>
+                    <a:lstStyle/>
+                    <a:p>
+                      <a:pPr algn="r"/>
+                      <a:r>
+                        <a:rPr sz="1400" b="0">
+                          <a:solidFill>
+                            <a:srgbClr val="1F3857"/>
+                          </a:solidFill>
+                        </a:rPr>
+                        <a:t>0.009</a:t>
+                      </a:r>
+                    </a:p>
+                  </a:txBody>
+                  <a:tcPr marT="18000" marB="18000"/>
+                </a:tc>
+              </a:tr>
+              <a:tr h="349134">
+                <a:tc>
+                  <a:txBody>
+                    <a:bodyPr/>
+                    <a:lstStyle/>
+                    <a:p>
+                      <a:pPr algn="l"/>
+                      <a:r>
+                        <a:rPr sz="1400" b="0">
+                          <a:solidFill>
+                            <a:srgbClr val="1F3857"/>
+                          </a:solidFill>
+                        </a:rPr>
+                        <a:t>shiftsq_c0.5</a:t>
+                      </a:r>
+                    </a:p>
+                  </a:txBody>
+                  <a:tcPr marT="18000" marB="18000"/>
+                </a:tc>
+                <a:tc>
+                  <a:txBody>
+                    <a:bodyPr/>
+                    <a:lstStyle/>
+                    <a:p>
+                      <a:pPr algn="l"/>
+                      <a:r>
+                        <a:rPr sz="1400" b="0">
+                          <a:solidFill>
+                            <a:srgbClr val="1F3857"/>
+                          </a:solidFill>
+                        </a:rPr>
+                        <a:t>no</a:t>
+                      </a:r>
+                    </a:p>
+                  </a:txBody>
+                  <a:tcPr marT="18000" marB="18000"/>
+                </a:tc>
+                <a:tc>
+                  <a:txBody>
+                    <a:bodyPr/>
+                    <a:lstStyle/>
+                    <a:p>
+                      <a:pPr algn="r"/>
+                      <a:r>
+                        <a:rPr sz="1400" b="0">
+                          <a:solidFill>
+                            <a:srgbClr val="1F3857"/>
+                          </a:solidFill>
+                        </a:rPr>
+                        <a:t>+3.53</a:t>
+                      </a:r>
+                    </a:p>
+                  </a:txBody>
+                  <a:tcPr marT="18000" marB="18000"/>
+                </a:tc>
+                <a:tc>
+                  <a:txBody>
+                    <a:bodyPr/>
+                    <a:lstStyle/>
+                    <a:p>
+                      <a:pPr algn="r"/>
+                      <a:r>
+                        <a:rPr sz="1400" b="0">
+                          <a:solidFill>
+                            <a:srgbClr val="1F3857"/>
+                          </a:solidFill>
+                        </a:rPr>
+                        <a:t>0.048</a:t>
+                      </a:r>
+                    </a:p>
+                  </a:txBody>
+                  <a:tcPr marT="18000" marB="18000"/>
+                </a:tc>
+              </a:tr>
+              <a:tr h="349134">
+                <a:tc>
+                  <a:txBody>
+                    <a:bodyPr/>
+                    <a:lstStyle/>
+                    <a:p>
+                      <a:pPr algn="l"/>
+                      <a:r>
+                        <a:rPr sz="1400" b="0">
+                          <a:solidFill>
+                            <a:srgbClr val="1F3857"/>
+                          </a:solidFill>
+                        </a:rPr>
+                        <a:t>mono5</a:t>
+                      </a:r>
+                    </a:p>
+                  </a:txBody>
+                  <a:tcPr marT="18000" marB="18000"/>
+                </a:tc>
+                <a:tc>
+                  <a:txBody>
+                    <a:bodyPr/>
+                    <a:lstStyle/>
+                    <a:p>
+                      <a:pPr algn="l"/>
+                      <a:r>
+                        <a:rPr sz="1400" b="0">
+                          <a:solidFill>
+                            <a:srgbClr val="1F3857"/>
+                          </a:solidFill>
+                        </a:rPr>
+                        <a:t>yes</a:t>
+                      </a:r>
+                    </a:p>
+                  </a:txBody>
+                  <a:tcPr marT="18000" marB="18000"/>
+                </a:tc>
+                <a:tc>
+                  <a:txBody>
+                    <a:bodyPr/>
+                    <a:lstStyle/>
+                    <a:p>
+                      <a:pPr algn="r"/>
+                      <a:r>
+                        <a:rPr sz="1400" b="0">
+                          <a:solidFill>
+                            <a:srgbClr val="1F3857"/>
+                          </a:solidFill>
+                        </a:rPr>
+                        <a:t>+2.91</a:t>
+                      </a:r>
+                    </a:p>
+                  </a:txBody>
+                  <a:tcPr marT="18000" marB="18000"/>
+                </a:tc>
+                <a:tc>
+                  <a:txBody>
+                    <a:bodyPr/>
+                    <a:lstStyle/>
+                    <a:p>
+                      <a:pPr algn="r"/>
+                      <a:r>
+                        <a:rPr sz="1400" b="0">
+                          <a:solidFill>
+                            <a:srgbClr val="1F3857"/>
+                          </a:solidFill>
+                        </a:rPr>
+                        <a:t>0.160</a:t>
+                      </a:r>
+                    </a:p>
+                  </a:txBody>
+                  <a:tcPr marT="18000" marB="18000"/>
+                </a:tc>
+              </a:tr>
+              <a:tr h="349134">
+                <a:tc>
+                  <a:txBody>
+                    <a:bodyPr/>
+                    <a:lstStyle/>
+                    <a:p>
+                      <a:pPr algn="l"/>
+                      <a:r>
+                        <a:rPr sz="1400" b="0">
+                          <a:solidFill>
+                            <a:srgbClr val="1F3857"/>
+                          </a:solidFill>
+                        </a:rPr>
+                        <a:t>shiftsq_c0</a:t>
+                      </a:r>
+                    </a:p>
+                  </a:txBody>
+                  <a:tcPr marT="18000" marB="18000"/>
+                </a:tc>
+                <a:tc>
+                  <a:txBody>
+                    <a:bodyPr/>
+                    <a:lstStyle/>
+                    <a:p>
+                      <a:pPr algn="l"/>
+                      <a:r>
+                        <a:rPr sz="1400" b="0">
+                          <a:solidFill>
+                            <a:srgbClr val="1F3857"/>
+                          </a:solidFill>
+                        </a:rPr>
+                        <a:t>no</a:t>
+                      </a:r>
+                    </a:p>
+                  </a:txBody>
+                  <a:tcPr marT="18000" marB="18000"/>
+                </a:tc>
+                <a:tc>
+                  <a:txBody>
+                    <a:bodyPr/>
+                    <a:lstStyle/>
+                    <a:p>
+                      <a:pPr algn="r"/>
+                      <a:r>
+                        <a:rPr sz="1400" b="0">
+                          <a:solidFill>
+                            <a:srgbClr val="1F3857"/>
+                          </a:solidFill>
+                        </a:rPr>
+                        <a:t>+2.70</a:t>
+                      </a:r>
+                    </a:p>
+                  </a:txBody>
+                  <a:tcPr marT="18000" marB="18000"/>
+                </a:tc>
+                <a:tc>
+                  <a:txBody>
+                    <a:bodyPr/>
+                    <a:lstStyle/>
+                    <a:p>
+                      <a:pPr algn="r"/>
+                      <a:r>
+                        <a:rPr sz="1400" b="0">
+                          <a:solidFill>
+                            <a:srgbClr val="1F3857"/>
+                          </a:solidFill>
+                        </a:rPr>
+                        <a:t>0.023</a:t>
+                      </a:r>
+                    </a:p>
+                  </a:txBody>
+                  <a:tcPr marT="18000" marB="18000"/>
+                </a:tc>
+              </a:tr>
+              <a:tr h="349134">
+                <a:tc>
+                  <a:txBody>
+                    <a:bodyPr/>
+                    <a:lstStyle/>
+                    <a:p>
+                      <a:pPr algn="l"/>
+                      <a:r>
+                        <a:rPr sz="1400" b="0">
+                          <a:solidFill>
+                            <a:srgbClr val="1F3857"/>
+                          </a:solidFill>
+                        </a:rPr>
+                        <a:t>cos_w2</a:t>
+                      </a:r>
+                    </a:p>
+                  </a:txBody>
+                  <a:tcPr marT="18000" marB="18000"/>
+                </a:tc>
+                <a:tc>
+                  <a:txBody>
+                    <a:bodyPr/>
+                    <a:lstStyle/>
+                    <a:p>
+                      <a:pPr algn="l"/>
+                      <a:r>
+                        <a:rPr sz="1400" b="0">
+                          <a:solidFill>
+                            <a:srgbClr val="1F3857"/>
+                          </a:solidFill>
+                        </a:rPr>
+                        <a:t>no</a:t>
+                      </a:r>
+                    </a:p>
+                  </a:txBody>
+                  <a:tcPr marT="18000" marB="18000"/>
+                </a:tc>
+                <a:tc>
+                  <a:txBody>
+                    <a:bodyPr/>
+                    <a:lstStyle/>
+                    <a:p>
+                      <a:pPr algn="r"/>
+                      <a:r>
+                        <a:rPr sz="1400" b="0">
+                          <a:solidFill>
+                            <a:srgbClr val="1F3857"/>
+                          </a:solidFill>
+                        </a:rPr>
+                        <a:t>+2.01</a:t>
+                      </a:r>
+                    </a:p>
+                  </a:txBody>
+                  <a:tcPr marT="18000" marB="18000"/>
+                </a:tc>
+                <a:tc>
+                  <a:txBody>
+                    <a:bodyPr/>
+                    <a:lstStyle/>
+                    <a:p>
+                      <a:pPr algn="r"/>
+                      <a:r>
+                        <a:rPr sz="1400" b="0">
+                          <a:solidFill>
+                            <a:srgbClr val="1F3857"/>
+                          </a:solidFill>
+                        </a:rPr>
+                        <a:t>0.014</a:t>
+                      </a:r>
+                    </a:p>
+                  </a:txBody>
+                  <a:tcPr marT="18000" marB="18000"/>
+                </a:tc>
+              </a:tr>
+              <a:tr h="349134">
+                <a:tc>
+                  <a:txBody>
+                    <a:bodyPr/>
+                    <a:lstStyle/>
+                    <a:p>
+                      <a:pPr algn="l"/>
+                      <a:r>
+                        <a:rPr sz="1400" b="0">
+                          <a:solidFill>
+                            <a:srgbClr val="1F3857"/>
+                          </a:solidFill>
+                        </a:rPr>
+                        <a:t>shiftsq_c3</a:t>
+                      </a:r>
+                    </a:p>
+                  </a:txBody>
+                  <a:tcPr marT="18000" marB="18000"/>
+                </a:tc>
+                <a:tc>
+                  <a:txBody>
+                    <a:bodyPr/>
+                    <a:lstStyle/>
+                    <a:p>
+                      <a:pPr algn="l"/>
+                      <a:r>
+                        <a:rPr sz="1400" b="0">
+                          <a:solidFill>
+                            <a:srgbClr val="1F3857"/>
+                          </a:solidFill>
+                        </a:rPr>
+                        <a:t>yes</a:t>
+                      </a:r>
+                    </a:p>
+                  </a:txBody>
+                  <a:tcPr marT="18000" marB="18000"/>
+                </a:tc>
+                <a:tc>
+                  <a:txBody>
+                    <a:bodyPr/>
+                    <a:lstStyle/>
+                    <a:p>
+                      <a:pPr algn="r"/>
+                      <a:r>
+                        <a:rPr sz="1400" b="0">
+                          <a:solidFill>
+                            <a:srgbClr val="1F3857"/>
+                          </a:solidFill>
+                        </a:rPr>
+                        <a:t>+1.69</a:t>
+                      </a:r>
+                    </a:p>
+                  </a:txBody>
+                  <a:tcPr marT="18000" marB="18000"/>
+                </a:tc>
+                <a:tc>
+                  <a:txBody>
+                    <a:bodyPr/>
+                    <a:lstStyle/>
+                    <a:p>
+                      <a:pPr algn="r"/>
+                      <a:r>
+                        <a:rPr sz="1400" b="0">
+                          <a:solidFill>
+                            <a:srgbClr val="1F3857"/>
+                          </a:solidFill>
+                        </a:rPr>
+                        <a:t>0.082</a:t>
+                      </a:r>
+                    </a:p>
+                  </a:txBody>
+                  <a:tcPr marT="18000" marB="18000"/>
+                </a:tc>
+              </a:tr>
+              <a:tr h="349134">
+                <a:tc>
+                  <a:txBody>
+                    <a:bodyPr/>
+                    <a:lstStyle/>
+                    <a:p>
+                      <a:pPr algn="l"/>
+                      <a:r>
+                        <a:rPr sz="1400" b="0">
+                          <a:solidFill>
+                            <a:srgbClr val="1F3857"/>
+                          </a:solidFill>
+                        </a:rPr>
+                        <a:t>spr3s050</a:t>
+                      </a:r>
+                    </a:p>
+                  </a:txBody>
+                  <a:tcPr marT="18000" marB="18000"/>
+                </a:tc>
+                <a:tc>
+                  <a:txBody>
+                    <a:bodyPr/>
+                    <a:lstStyle/>
+                    <a:p>
+                      <a:pPr algn="l"/>
+                      <a:r>
+                        <a:rPr sz="1400" b="0">
+                          <a:solidFill>
+                            <a:srgbClr val="1F3857"/>
+                          </a:solidFill>
+                        </a:rPr>
+                        <a:t>no</a:t>
+                      </a:r>
+                    </a:p>
+                  </a:txBody>
+                  <a:tcPr marT="18000" marB="18000"/>
+                </a:tc>
+                <a:tc>
+                  <a:txBody>
+                    <a:bodyPr/>
+                    <a:lstStyle/>
+                    <a:p>
+                      <a:pPr algn="r"/>
+                      <a:r>
+                        <a:rPr sz="1400" b="0">
+                          <a:solidFill>
+                            <a:srgbClr val="1F3857"/>
+                          </a:solidFill>
+                        </a:rPr>
+                        <a:t>+1.59</a:t>
+                      </a:r>
+                    </a:p>
+                  </a:txBody>
+                  <a:tcPr marT="18000" marB="18000"/>
+                </a:tc>
+                <a:tc>
+                  <a:txBody>
+                    <a:bodyPr/>
+                    <a:lstStyle/>
+                    <a:p>
+                      <a:pPr algn="r"/>
+                      <a:r>
+                        <a:rPr sz="1400" b="0">
+                          <a:solidFill>
+                            <a:srgbClr val="1F3857"/>
+                          </a:solidFill>
+                        </a:rPr>
+                        <a:t>0.141</a:t>
+                      </a:r>
+                    </a:p>
+                  </a:txBody>
+                  <a:tcPr marT="18000" marB="18000"/>
+                </a:tc>
+              </a:tr>
+              <a:tr h="349140">
+                <a:tc>
+                  <a:txBody>
+                    <a:bodyPr/>
+                    <a:lstStyle/>
+                    <a:p>
+                      <a:pPr algn="l"/>
+                      <a:r>
+                        <a:rPr sz="1400" b="0">
+                          <a:solidFill>
+                            <a:srgbClr val="1F3857"/>
+                          </a:solidFill>
+                        </a:rPr>
+                        <a:t>mono3</a:t>
+                      </a:r>
+                    </a:p>
+                  </a:txBody>
+                  <a:tcPr marT="18000" marB="18000"/>
+                </a:tc>
+                <a:tc>
+                  <a:txBody>
+                    <a:bodyPr/>
+                    <a:lstStyle/>
+                    <a:p>
+                      <a:pPr algn="l"/>
+                      <a:r>
+                        <a:rPr sz="1400" b="0">
+                          <a:solidFill>
+                            <a:srgbClr val="1F3857"/>
+                          </a:solidFill>
+                        </a:rPr>
+                        <a:t>yes</a:t>
+                      </a:r>
+                    </a:p>
+                  </a:txBody>
+                  <a:tcPr marT="18000" marB="18000"/>
+                </a:tc>
+                <a:tc>
+                  <a:txBody>
+                    <a:bodyPr/>
+                    <a:lstStyle/>
+                    <a:p>
+                      <a:pPr algn="r"/>
+                      <a:r>
+                        <a:rPr sz="1400" b="0">
+                          <a:solidFill>
+                            <a:srgbClr val="1F3857"/>
+                          </a:solidFill>
+                        </a:rPr>
+                        <a:t>+1.58</a:t>
+                      </a:r>
+                    </a:p>
+                  </a:txBody>
+                  <a:tcPr marT="18000" marB="18000"/>
+                </a:tc>
+                <a:tc>
+                  <a:txBody>
+                    <a:bodyPr/>
+                    <a:lstStyle/>
+                    <a:p>
+                      <a:pPr algn="r"/>
+                      <a:r>
+                        <a:rPr sz="1400" b="0">
+                          <a:solidFill>
+                            <a:srgbClr val="1F3857"/>
+                          </a:solidFill>
+                        </a:rPr>
+                        <a:t>0.204</a:t>
+                      </a:r>
+                    </a:p>
+                  </a:txBody>
+                  <a:tcPr marT="18000" marB="18000"/>
+                </a:tc>
+              </a:tr>
+            </a:tbl>
+          </a:graphicData>
+        </a:graphic>
+      </p:graphicFrame>
+    </p:spTree>
+  </p:cSld>
+  <p:clrMapOvr>
+    <a:masterClrMapping/>
+  </p:clrMapOvr>
+</p:sld>
+</file>
+
+<file path=ppt/slides/slide14.xml><?xml version="1.0" encoding="utf-8"?>
+<p:sld xmlns:a="http://schemas.openxmlformats.org/drawingml/2006/main" xmlns:p="http://schemas.openxmlformats.org/presentationml/2006/main" xmlns:r="http://schemas.openxmlformats.org/officeDocument/2006/relationships">
+  <p:cSld>
+    <p:spTree>
+      <p:nvGrpSpPr>
+        <p:cNvPr id="1" name=""/>
+        <p:cNvGrpSpPr/>
+        <p:nvPr/>
+      </p:nvGrpSpPr>
+      <p:grpSpPr/>
+      <p:sp>
+        <p:nvSpPr>
+          <p:cNvPr id="2" name="TextBox 1"/>
+          <p:cNvSpPr txBox="1"/>
+          <p:nvPr/>
+        </p:nvSpPr>
+        <p:spPr>
+          <a:xfrm>
+            <a:off x="502920" y="274320"/>
+            <a:ext cx="11155680" cy="731520"/>
+          </a:xfrm>
+          <a:prstGeom prst="rect">
+            <a:avLst/>
+          </a:prstGeom>
+          <a:noFill/>
+        </p:spPr>
+        <p:txBody>
+          <a:bodyPr wrap="square">
+            <a:spAutoFit/>
+          </a:bodyPr>
+          <a:lstStyle/>
+          <a:p>
+            <a:pPr algn="l"/>
+            <a:r>
+              <a:rPr sz="3000" b="1">
+                <a:solidFill>
+                  <a:srgbClr val="1F3857"/>
+                </a:solidFill>
+              </a:rPr>
+              <a:t>The two settings do not agree</a:t>
+            </a:r>
+          </a:p>
+        </p:txBody>
+      </p:sp>
+      <p:sp>
+        <p:nvSpPr>
+          <p:cNvPr id="3" name="TextBox 2"/>
+          <p:cNvSpPr txBox="1"/>
+          <p:nvPr/>
+        </p:nvSpPr>
+        <p:spPr>
+          <a:xfrm>
+            <a:off x="502920" y="960120"/>
+            <a:ext cx="11155680" cy="457200"/>
+          </a:xfrm>
+          <a:prstGeom prst="rect">
+            <a:avLst/>
+          </a:prstGeom>
+          <a:noFill/>
+        </p:spPr>
+        <p:txBody>
+          <a:bodyPr wrap="square">
+            <a:spAutoFit/>
+          </a:bodyPr>
+          <a:lstStyle/>
+          <a:p>
+            <a:pPr algn="l"/>
+            <a:r>
+              <a:rPr sz="1500" b="0">
+                <a:solidFill>
+                  <a:srgbClr val="555F6B"/>
+                </a:solidFill>
+              </a:rPr>
+              <a:t>the 17 maps measured in both</a:t>
+            </a:r>
+          </a:p>
+        </p:txBody>
+      </p:sp>
+      <p:pic>
+        <p:nvPicPr>
+          <p:cNvPr id="4" name="Picture 3" descr="so_vs_mo.png"/>
+          <p:cNvPicPr>
+            <a:picLocks noChangeAspect="1"/>
+          </p:cNvPicPr>
+          <p:nvPr/>
+        </p:nvPicPr>
+        <p:blipFill>
+          <a:blip r:embed="rId2"/>
+          <a:stretch>
+            <a:fillRect/>
+          </a:stretch>
+        </p:blipFill>
+        <p:spPr>
+          <a:xfrm>
+            <a:off x="457200" y="1463040"/>
+            <a:ext cx="6694205" cy="4572000"/>
+          </a:xfrm>
+          <a:prstGeom prst="rect">
+            <a:avLst/>
+          </a:prstGeom>
+        </p:spPr>
+      </p:pic>
+      <p:sp>
+        <p:nvSpPr>
+          <p:cNvPr id="5" name="TextBox 4"/>
+          <p:cNvSpPr txBox="1"/>
+          <p:nvPr/>
+        </p:nvSpPr>
+        <p:spPr>
+          <a:xfrm>
+            <a:off x="8229600" y="1554480"/>
+            <a:ext cx="3657600" cy="457200"/>
+          </a:xfrm>
+          <a:prstGeom prst="rect">
+            <a:avLst/>
+          </a:prstGeom>
+          <a:noFill/>
+        </p:spPr>
+        <p:txBody>
+          <a:bodyPr wrap="square">
+            <a:spAutoFit/>
+          </a:bodyPr>
+          <a:lstStyle/>
+          <a:p>
+            <a:pPr algn="l"/>
+            <a:r>
+              <a:rPr sz="1400" b="1">
+                <a:solidFill>
+                  <a:srgbClr val="1F3857"/>
+                </a:solidFill>
+              </a:rPr>
+              <a:t>•  Pearson r = −0.19, Spearman ρ = −0.00</a:t>
+            </a:r>
+          </a:p>
+        </p:txBody>
+      </p:sp>
+      <p:sp>
+        <p:nvSpPr>
+          <p:cNvPr id="6" name="TextBox 5"/>
+          <p:cNvSpPr txBox="1"/>
+          <p:nvPr/>
+        </p:nvSpPr>
+        <p:spPr>
+          <a:xfrm>
+            <a:off x="8229600" y="1956816"/>
+            <a:ext cx="3657600" cy="457200"/>
+          </a:xfrm>
+          <a:prstGeom prst="rect">
+            <a:avLst/>
+          </a:prstGeom>
+          <a:noFill/>
+        </p:spPr>
+        <p:txBody>
+          <a:bodyPr wrap="square">
+            <a:spAutoFit/>
+          </a:bodyPr>
+          <a:lstStyle/>
+          <a:p>
+            <a:pPr algn="l"/>
+            <a:r>
+              <a:rPr sz="1400" b="0">
+                <a:solidFill>
+                  <a:srgbClr val="555F6B"/>
+                </a:solidFill>
+              </a:rPr>
+              <a:t>(without root5: −0.05, +0.02)</a:t>
+            </a:r>
+          </a:p>
+        </p:txBody>
+      </p:sp>
+      <p:sp>
+        <p:nvSpPr>
+          <p:cNvPr id="7" name="TextBox 6"/>
+          <p:cNvSpPr txBox="1"/>
+          <p:nvPr/>
+        </p:nvSpPr>
+        <p:spPr>
+          <a:xfrm>
+            <a:off x="8229600" y="2359152"/>
+            <a:ext cx="3657600" cy="457200"/>
+          </a:xfrm>
+          <a:prstGeom prst="rect">
+            <a:avLst/>
+          </a:prstGeom>
+          <a:noFill/>
+        </p:spPr>
+        <p:txBody>
+          <a:bodyPr wrap="square">
+            <a:spAutoFit/>
+          </a:bodyPr>
+          <a:lstStyle/>
+          <a:p>
+            <a:pPr algn="l"/>
+            <a:r>
+              <a:rPr sz="1400" b="0">
+                <a:solidFill>
+                  <a:srgbClr val="555F6B"/>
+                </a:solidFill>
+              </a:rPr>
+              <a:t>•  root5:  +0.42 regret, +31% HV</a:t>
+            </a:r>
+          </a:p>
+        </p:txBody>
+      </p:sp>
+      <p:sp>
+        <p:nvSpPr>
+          <p:cNvPr id="8" name="TextBox 7"/>
+          <p:cNvSpPr txBox="1"/>
+          <p:nvPr/>
+        </p:nvSpPr>
+        <p:spPr>
+          <a:xfrm>
+            <a:off x="8229600" y="2761488"/>
+            <a:ext cx="3657600" cy="457200"/>
+          </a:xfrm>
+          <a:prstGeom prst="rect">
+            <a:avLst/>
+          </a:prstGeom>
+          <a:noFill/>
+        </p:spPr>
+        <p:txBody>
+          <a:bodyPr wrap="square">
+            <a:spAutoFit/>
+          </a:bodyPr>
+          <a:lstStyle/>
+          <a:p>
+            <a:pPr algn="l"/>
+            <a:r>
+              <a:rPr sz="1400" b="0">
+                <a:solidFill>
+                  <a:srgbClr val="555F6B"/>
+                </a:solidFill>
+              </a:rPr>
+              <a:t>•  shiftsq_c2:  +2.78 regret, +0.17% HV</a:t>
+            </a:r>
+          </a:p>
+        </p:txBody>
+      </p:sp>
+      <p:sp>
+        <p:nvSpPr>
+          <p:cNvPr id="9" name="TextBox 8"/>
+          <p:cNvSpPr txBox="1"/>
+          <p:nvPr/>
+        </p:nvSpPr>
+        <p:spPr>
+          <a:xfrm>
+            <a:off x="8229600" y="3163824"/>
+            <a:ext cx="3657600" cy="457200"/>
+          </a:xfrm>
+          <a:prstGeom prst="rect">
+            <a:avLst/>
+          </a:prstGeom>
+          <a:noFill/>
+        </p:spPr>
+        <p:txBody>
+          <a:bodyPr wrap="square">
+            <a:spAutoFit/>
+          </a:bodyPr>
+          <a:lstStyle/>
+          <a:p>
+            <a:pPr algn="l"/>
+            <a:r>
+              <a:rPr sz="1400" b="0">
+                <a:solidFill>
+                  <a:srgbClr val="555F6B"/>
+                </a:solidFill>
+              </a:rPr>
+              <a:t>•  </a:t>
+            </a:r>
+          </a:p>
+        </p:txBody>
+      </p:sp>
+      <p:sp>
+        <p:nvSpPr>
+          <p:cNvPr id="10" name="TextBox 9"/>
+          <p:cNvSpPr txBox="1"/>
+          <p:nvPr/>
+        </p:nvSpPr>
+        <p:spPr>
+          <a:xfrm>
+            <a:off x="8229600" y="3566160"/>
+            <a:ext cx="3657600" cy="457200"/>
+          </a:xfrm>
+          <a:prstGeom prst="rect">
+            <a:avLst/>
+          </a:prstGeom>
+          <a:noFill/>
+        </p:spPr>
+        <p:txBody>
+          <a:bodyPr wrap="square">
+            <a:spAutoFit/>
+          </a:bodyPr>
+          <a:lstStyle/>
+          <a:p>
+            <a:pPr algn="l"/>
+            <a:r>
+              <a:rPr sz="1400" b="1">
+                <a:solidFill>
+                  <a:srgbClr val="1F3857"/>
+                </a:solidFill>
+              </a:rPr>
+              <a:t>•  The plateau measure does not</a:t>
+            </a:r>
+          </a:p>
+        </p:txBody>
+      </p:sp>
+      <p:sp>
+        <p:nvSpPr>
+          <p:cNvPr id="11" name="TextBox 10"/>
+          <p:cNvSpPr txBox="1"/>
+          <p:nvPr/>
+        </p:nvSpPr>
+        <p:spPr>
+          <a:xfrm>
+            <a:off x="8229600" y="3968496"/>
+            <a:ext cx="3657600" cy="457200"/>
+          </a:xfrm>
+          <a:prstGeom prst="rect">
+            <a:avLst/>
+          </a:prstGeom>
+          <a:noFill/>
+        </p:spPr>
+        <p:txBody>
+          <a:bodyPr wrap="square">
+            <a:spAutoFit/>
+          </a:bodyPr>
+          <a:lstStyle/>
+          <a:p>
+            <a:pPr algn="l"/>
+            <a:r>
+              <a:rPr sz="1400" b="0">
+                <a:solidFill>
+                  <a:srgbClr val="555F6B"/>
+                </a:solidFill>
+              </a:rPr>
+              <a:t>•  transfer: r = +0.78 single-objective,</a:t>
+            </a:r>
+          </a:p>
+        </p:txBody>
+      </p:sp>
+      <p:sp>
+        <p:nvSpPr>
+          <p:cNvPr id="12" name="TextBox 11"/>
+          <p:cNvSpPr txBox="1"/>
+          <p:nvPr/>
+        </p:nvSpPr>
+        <p:spPr>
+          <a:xfrm>
+            <a:off x="8229600" y="4370832"/>
+            <a:ext cx="3657600" cy="457200"/>
+          </a:xfrm>
+          <a:prstGeom prst="rect">
+            <a:avLst/>
+          </a:prstGeom>
+          <a:noFill/>
+        </p:spPr>
+        <p:txBody>
+          <a:bodyPr wrap="square">
+            <a:spAutoFit/>
+          </a:bodyPr>
+          <a:lstStyle/>
+          <a:p>
+            <a:pPr algn="l"/>
+            <a:r>
+              <a:rPr sz="1400" b="1">
+                <a:solidFill>
+                  <a:srgbClr val="1F3857"/>
+                </a:solidFill>
+              </a:rPr>
+              <a:t>•  r = −0.36 against hypervolume.</a:t>
+            </a:r>
+          </a:p>
+        </p:txBody>
+      </p:sp>
+      <p:sp>
+        <p:nvSpPr>
+          <p:cNvPr id="13" name="TextBox 12"/>
+          <p:cNvSpPr txBox="1"/>
+          <p:nvPr/>
+        </p:nvSpPr>
+        <p:spPr>
+          <a:xfrm>
+            <a:off x="8229600" y="4773168"/>
+            <a:ext cx="3657600" cy="457200"/>
+          </a:xfrm>
+          <a:prstGeom prst="rect">
+            <a:avLst/>
+          </a:prstGeom>
+          <a:noFill/>
+        </p:spPr>
+        <p:txBody>
+          <a:bodyPr wrap="square">
+            <a:spAutoFit/>
+          </a:bodyPr>
+          <a:lstStyle/>
+          <a:p>
+            <a:pPr algn="l"/>
+            <a:r>
+              <a:rPr sz="1400" b="0">
+                <a:solidFill>
+                  <a:srgbClr val="555F6B"/>
+                </a:solidFill>
+              </a:rPr>
+              <a:t>•  </a:t>
+            </a:r>
+          </a:p>
+        </p:txBody>
+      </p:sp>
+      <p:sp>
+        <p:nvSpPr>
+          <p:cNvPr id="14" name="TextBox 13"/>
+          <p:cNvSpPr txBox="1"/>
+          <p:nvPr/>
+        </p:nvSpPr>
+        <p:spPr>
+          <a:xfrm>
+            <a:off x="8229600" y="5175504"/>
+            <a:ext cx="3657600" cy="457200"/>
+          </a:xfrm>
+          <a:prstGeom prst="rect">
+            <a:avLst/>
+          </a:prstGeom>
+          <a:noFill/>
+        </p:spPr>
+        <p:txBody>
+          <a:bodyPr wrap="square">
+            <a:spAutoFit/>
+          </a:bodyPr>
+          <a:lstStyle/>
+          <a:p>
+            <a:pPr algn="l"/>
+            <a:r>
+              <a:rPr sz="1400" b="0">
+                <a:solidFill>
+                  <a:srgbClr val="555F6B"/>
+                </a:solidFill>
+              </a:rPr>
+              <a:t>•  shiftsq_c3: 1st of 17 by regret,</a:t>
+            </a:r>
+          </a:p>
+        </p:txBody>
+      </p:sp>
+      <p:sp>
+        <p:nvSpPr>
+          <p:cNvPr id="15" name="TextBox 14"/>
+          <p:cNvSpPr txBox="1"/>
+          <p:nvPr/>
+        </p:nvSpPr>
+        <p:spPr>
+          <a:xfrm>
+            <a:off x="8229600" y="5577840"/>
+            <a:ext cx="3657600" cy="457200"/>
+          </a:xfrm>
+          <a:prstGeom prst="rect">
+            <a:avLst/>
+          </a:prstGeom>
+          <a:noFill/>
+        </p:spPr>
+        <p:txBody>
+          <a:bodyPr wrap="square">
+            <a:spAutoFit/>
+          </a:bodyPr>
+          <a:lstStyle/>
+          <a:p>
+            <a:pPr algn="l"/>
+            <a:r>
+              <a:rPr sz="1400" b="0">
+                <a:solidFill>
+                  <a:srgbClr val="555F6B"/>
+                </a:solidFill>
+              </a:rPr>
+              <a:t>•  8th of 21 by hypervolume.</a:t>
+            </a:r>
+          </a:p>
+        </p:txBody>
+      </p:sp>
+    </p:spTree>
+  </p:cSld>
+  <p:clrMapOvr>
+    <a:masterClrMapping/>
+  </p:clrMapOvr>
+</p:sld>
+</file>
+
+<file path=ppt/slides/slide15.xml><?xml version="1.0" encoding="utf-8"?>
+<p:sld xmlns:a="http://schemas.openxmlformats.org/drawingml/2006/main" xmlns:p="http://schemas.openxmlformats.org/presentationml/2006/main" xmlns:r="http://schemas.openxmlformats.org/officeDocument/2006/relationships">
+  <p:cSld>
+    <p:spTree>
+      <p:nvGrpSpPr>
+        <p:cNvPr id="1" name=""/>
+        <p:cNvGrpSpPr/>
+        <p:nvPr/>
+      </p:nvGrpSpPr>
+      <p:grpSpPr/>
+      <p:sp>
+        <p:nvSpPr>
+          <p:cNvPr id="2" name="TextBox 1"/>
+          <p:cNvSpPr txBox="1"/>
+          <p:nvPr/>
+        </p:nvSpPr>
+        <p:spPr>
+          <a:xfrm>
+            <a:off x="502920" y="274320"/>
+            <a:ext cx="11155680" cy="731520"/>
+          </a:xfrm>
+          <a:prstGeom prst="rect">
+            <a:avLst/>
+          </a:prstGeom>
+          <a:noFill/>
+        </p:spPr>
+        <p:txBody>
+          <a:bodyPr wrap="square">
+            <a:spAutoFit/>
+          </a:bodyPr>
+          <a:lstStyle/>
+          <a:p>
+            <a:pPr algn="l"/>
+            <a:r>
+              <a:rPr sz="3000" b="1">
+                <a:solidFill>
+                  <a:srgbClr val="1F3857"/>
+                </a:solidFill>
+              </a:rPr>
+              <a:t>What survives, and one trap</a:t>
+            </a:r>
+          </a:p>
+        </p:txBody>
+      </p:sp>
+      <p:graphicFrame>
+        <p:nvGraphicFramePr>
+          <p:cNvPr id="3" name="Table 2"/>
+          <p:cNvGraphicFramePr>
+            <a:graphicFrameLocks noGrp="1"/>
+          </p:cNvGraphicFramePr>
+          <p:nvPr/>
+        </p:nvGraphicFramePr>
+        <p:xfrm>
+          <a:off x="1097280" y="1645920"/>
+          <a:ext cx="9966960" cy="1371600"/>
+        </p:xfrm>
+        <a:graphic>
+          <a:graphicData uri="http://schemas.openxmlformats.org/drawingml/2006/table">
+            <a:tbl>
+              <a:tblPr firstRow="1" bandRow="1">
+                <a:tableStyleId>{5C22544A-7EE6-4342-B048-85BDC9FD1C3A}</a:tableStyleId>
+              </a:tblPr>
+              <a:tblGrid>
+                <a:gridCol w="3322320"/>
+                <a:gridCol w="3322320"/>
+                <a:gridCol w="3322320"/>
+              </a:tblGrid>
+              <a:tr h="457200">
+                <a:tc>
+                  <a:txBody>
+                    <a:bodyPr/>
+                    <a:lstStyle/>
+                    <a:p>
+                      <a:pPr algn="l"/>
+                    </a:p>
+                  </a:txBody>
+                  <a:tcPr marT="18000" marB="18000"/>
+                </a:tc>
+                <a:tc>
+                  <a:txBody>
+                    <a:bodyPr/>
+                    <a:lstStyle/>
+                    <a:p>
+                      <a:pPr algn="l"/>
+                      <a:r>
+                        <a:rPr sz="1500" b="1">
+                          <a:solidFill>
+                            <a:srgbClr val="FFFFFF"/>
+                          </a:solidFill>
+                        </a:rPr>
+                        <a:t>Single objective</a:t>
+                      </a:r>
+                    </a:p>
+                  </a:txBody>
+                  <a:tcPr marT="18000" marB="18000"/>
+                </a:tc>
+                <a:tc>
+                  <a:txBody>
+                    <a:bodyPr/>
+                    <a:lstStyle/>
+                    <a:p>
+                      <a:pPr algn="l"/>
+                      <a:r>
+                        <a:rPr sz="1500" b="1">
+                          <a:solidFill>
+                            <a:srgbClr val="FFFFFF"/>
+                          </a:solidFill>
+                        </a:rPr>
+                        <a:t>Multi objective</a:t>
+                      </a:r>
+                    </a:p>
+                  </a:txBody>
+                  <a:tcPr marT="18000" marB="18000"/>
+                </a:tc>
+              </a:tr>
+              <a:tr h="457200">
+                <a:tc>
+                  <a:txBody>
+                    <a:bodyPr/>
+                    <a:lstStyle/>
+                    <a:p>
+                      <a:pPr algn="l"/>
+                      <a:r>
+                        <a:rPr sz="1500" b="0">
+                          <a:solidFill>
+                            <a:srgbClr val="1F3857"/>
+                          </a:solidFill>
+                        </a:rPr>
+                        <a:t>bijective (n=6)</a:t>
+                      </a:r>
+                    </a:p>
+                  </a:txBody>
+                  <a:tcPr marT="18000" marB="18000"/>
+                </a:tc>
+                <a:tc>
+                  <a:txBody>
+                    <a:bodyPr/>
+                    <a:lstStyle/>
+                    <a:p>
+                      <a:pPr algn="l"/>
+                      <a:r>
+                        <a:rPr sz="1500" b="0">
+                          <a:solidFill>
+                            <a:srgbClr val="1F3857"/>
+                          </a:solidFill>
+                        </a:rPr>
+                        <a:t>+0.45,  0 of 6 significant</a:t>
+                      </a:r>
+                    </a:p>
+                  </a:txBody>
+                  <a:tcPr marT="18000" marB="18000"/>
+                </a:tc>
+                <a:tc>
+                  <a:txBody>
+                    <a:bodyPr/>
+                    <a:lstStyle/>
+                    <a:p>
+                      <a:pPr algn="l"/>
+                      <a:r>
+                        <a:rPr sz="1500" b="0">
+                          <a:solidFill>
+                            <a:srgbClr val="1F3857"/>
+                          </a:solidFill>
+                        </a:rPr>
+                        <a:t>+1.19%,  0 of 6 significant</a:t>
+                      </a:r>
+                    </a:p>
+                  </a:txBody>
+                  <a:tcPr marT="18000" marB="18000"/>
+                </a:tc>
+              </a:tr>
+              <a:tr h="457200">
+                <a:tc>
+                  <a:txBody>
+                    <a:bodyPr/>
+                    <a:lstStyle/>
+                    <a:p>
+                      <a:pPr algn="l"/>
+                      <a:r>
+                        <a:rPr sz="1500" b="0">
+                          <a:solidFill>
+                            <a:srgbClr val="1F3857"/>
+                          </a:solidFill>
+                        </a:rPr>
+                        <a:t>not bijective (n=11)</a:t>
+                      </a:r>
+                    </a:p>
+                  </a:txBody>
+                  <a:tcPr marT="18000" marB="18000"/>
+                </a:tc>
+                <a:tc>
+                  <a:txBody>
+                    <a:bodyPr/>
+                    <a:lstStyle/>
+                    <a:p>
+                      <a:pPr algn="l"/>
+                      <a:r>
+                        <a:rPr sz="1500" b="0">
+                          <a:solidFill>
+                            <a:srgbClr val="1F3857"/>
+                          </a:solidFill>
+                        </a:rPr>
+                        <a:t>+1.80,  10 of 11</a:t>
+                      </a:r>
+                    </a:p>
+                  </a:txBody>
+                  <a:tcPr marT="18000" marB="18000"/>
+                </a:tc>
+                <a:tc>
+                  <a:txBody>
+                    <a:bodyPr/>
+                    <a:lstStyle/>
+                    <a:p>
+                      <a:pPr algn="l"/>
+                      <a:r>
+                        <a:rPr sz="1500" b="0">
+                          <a:solidFill>
+                            <a:srgbClr val="1F3857"/>
+                          </a:solidFill>
+                        </a:rPr>
+                        <a:t>+4.28%,  5 of 11</a:t>
+                      </a:r>
+                    </a:p>
+                  </a:txBody>
+                  <a:tcPr marT="18000" marB="18000"/>
+                </a:tc>
+              </a:tr>
+            </a:tbl>
+          </a:graphicData>
+        </a:graphic>
+      </p:graphicFrame>
+      <p:sp>
+        <p:nvSpPr>
+          <p:cNvPr id="4" name="TextBox 3"/>
+          <p:cNvSpPr txBox="1"/>
+          <p:nvPr/>
+        </p:nvSpPr>
+        <p:spPr>
+          <a:xfrm>
+            <a:off x="685800" y="3383280"/>
+            <a:ext cx="10789920" cy="457200"/>
+          </a:xfrm>
+          <a:prstGeom prst="rect">
+            <a:avLst/>
+          </a:prstGeom>
+          <a:noFill/>
+        </p:spPr>
+        <p:txBody>
+          <a:bodyPr wrap="square">
+            <a:spAutoFit/>
+          </a:bodyPr>
+          <a:lstStyle/>
+          <a:p>
+            <a:pPr algn="l"/>
+            <a:r>
+              <a:rPr sz="1600" b="1">
+                <a:solidFill>
+                  <a:srgbClr val="1F3857"/>
+                </a:solidFill>
+              </a:rPr>
+              <a:t>•  The grouping carries over — same direction, much weaker. The qualitative prediction survives; the quantitative structure behind it does not.</a:t>
+            </a:r>
+          </a:p>
+        </p:txBody>
+      </p:sp>
+      <p:sp>
+        <p:nvSpPr>
+          <p:cNvPr id="5" name="TextBox 4"/>
+          <p:cNvSpPr txBox="1"/>
+          <p:nvPr/>
+        </p:nvSpPr>
+        <p:spPr>
+          <a:xfrm>
+            <a:off x="685800" y="4224528"/>
+            <a:ext cx="10789920" cy="457200"/>
+          </a:xfrm>
+          <a:prstGeom prst="rect">
+            <a:avLst/>
+          </a:prstGeom>
+          <a:noFill/>
+        </p:spPr>
+        <p:txBody>
+          <a:bodyPr wrap="square">
+            <a:spAutoFit/>
+          </a:bodyPr>
+          <a:lstStyle/>
+          <a:p>
+            <a:pPr algn="l"/>
+            <a:r>
+              <a:rPr sz="1600" b="1">
+                <a:solidFill>
+                  <a:srgbClr val="1F3857"/>
+                </a:solidFill>
+              </a:rPr>
+              <a:t>•  root5's +31% is a scale artefact. Its objective stays extremely heavy-tailed after percentile normalisation (ratio 256 against a typical 2–10), so one lucky evaluation moves the hypervolume.</a:t>
+            </a:r>
+          </a:p>
+        </p:txBody>
+      </p:sp>
+      <p:sp>
+        <p:nvSpPr>
+          <p:cNvPr id="6" name="TextBox 5"/>
+          <p:cNvSpPr txBox="1"/>
+          <p:nvPr/>
+        </p:nvSpPr>
+        <p:spPr>
+          <a:xfrm>
+            <a:off x="685800" y="5065776"/>
+            <a:ext cx="10789920" cy="457200"/>
+          </a:xfrm>
+          <a:prstGeom prst="rect">
+            <a:avLst/>
+          </a:prstGeom>
+          <a:noFill/>
+        </p:spPr>
+        <p:txBody>
+          <a:bodyPr wrap="square">
+            <a:spAutoFit/>
+          </a:bodyPr>
+          <a:lstStyle/>
+          <a:p>
+            <a:pPr algn="l"/>
+            <a:r>
+              <a:rPr sz="1600" b="1">
+                <a:solidFill>
+                  <a:srgbClr val="1F3857"/>
+                </a:solidFill>
+              </a:rPr>
+              <a:t>•  And it nearly fooled the analysis: tail-heaviness appears to explain the gains at r = +0.94 — which collapses to −0.02 once that single point is removed.</a:t>
+            </a:r>
+          </a:p>
+        </p:txBody>
+      </p:sp>
+    </p:spTree>
+  </p:cSld>
+  <p:clrMapOvr>
+    <a:masterClrMapping/>
+  </p:clrMapOvr>
+</p:sld>
+</file>
+
+<file path=ppt/slides/slide16.xml><?xml version="1.0" encoding="utf-8"?>
+<p:sld xmlns:a="http://schemas.openxmlformats.org/drawingml/2006/main" xmlns:p="http://schemas.openxmlformats.org/presentationml/2006/main" xmlns:r="http://schemas.openxmlformats.org/officeDocument/2006/relationships">
+  <p:cSld>
+    <p:spTree>
+      <p:nvGrpSpPr>
+        <p:cNvPr id="1" name=""/>
+        <p:cNvGrpSpPr/>
+        <p:nvPr/>
+      </p:nvGrpSpPr>
+      <p:grpSpPr/>
+      <p:sp>
+        <p:nvSpPr>
+          <p:cNvPr id="2" name="TextBox 1"/>
+          <p:cNvSpPr txBox="1"/>
+          <p:nvPr/>
+        </p:nvSpPr>
+        <p:spPr>
+          <a:xfrm>
+            <a:off x="502920" y="274320"/>
+            <a:ext cx="11155680" cy="731520"/>
+          </a:xfrm>
+          <a:prstGeom prst="rect">
+            <a:avLst/>
+          </a:prstGeom>
+          <a:noFill/>
+        </p:spPr>
+        <p:txBody>
+          <a:bodyPr wrap="square">
+            <a:spAutoFit/>
+          </a:bodyPr>
+          <a:lstStyle/>
+          <a:p>
+            <a:pPr algn="l"/>
+            <a:r>
+              <a:rPr sz="3000" b="1">
+                <a:solidFill>
+                  <a:srgbClr val="1F3857"/>
+                </a:solidFill>
+              </a:rPr>
               <a:t>What this means</a:t>
             </a:r>
           </a:p>
@@ -4400,7 +6345,7 @@
                   <a:srgbClr val="1F3857"/>
                 </a:solidFill>
               </a:rPr>
-              <a:t>•  The proposition's prediction holds. Bijective g: no gain, in 5 of 6 cases. Non-bijective g: a gain every time, up to 3.4 orders of magnitude.</a:t>
+              <a:t>•  The proposition's prediction holds. Bijective g: no gain, in 5 of 6 cases. Non-bijective g: a gain every time. The same split appears with two objectives, weaker.</a:t>
             </a:r>
           </a:p>
         </p:txBody>
@@ -4468,7 +6413,7 @@
                   <a:srgbClr val="1F3857"/>
                 </a:solidFill>
               </a:rPr>
-              <a:t>•  The operative property is flatness of g at its optimum. Bijectivity predicts the gain because it rules that out.</a:t>
+              <a:t>•  The operative property is flatness of g at its optimum — in the single-objective setting. Bijectivity predicts the gain because it rules that out.</a:t>
             </a:r>
           </a:p>
         </p:txBody>
@@ -4502,7 +6447,7 @@
                   <a:srgbClr val="1F3857"/>
                 </a:solidFill>
               </a:rPr>
-              <a:t>•  The earlier three-channel decomposition is withdrawn — it was measured on a grid where Composite held the true kernel.</a:t>
+              <a:t>•  None of the magnitudes survive two objectives: gains uncorrelated with the single-objective ones, and the plateau measure stops working.</a:t>
             </a:r>
           </a:p>
         </p:txBody>
@@ -4516,6 +6461,40 @@
         <p:spPr>
           <a:xfrm>
             <a:off x="685800" y="5029200"/>
+            <a:ext cx="10789920" cy="457200"/>
+          </a:xfrm>
+          <a:prstGeom prst="rect">
+            <a:avLst/>
+          </a:prstGeom>
+          <a:noFill/>
+        </p:spPr>
+        <p:txBody>
+          <a:bodyPr wrap="square">
+            <a:spAutoFit/>
+          </a:bodyPr>
+          <a:lstStyle/>
+          <a:p>
+            <a:pPr algn="l"/>
+            <a:r>
+              <a:rPr sz="1700" b="1">
+                <a:solidFill>
+                  <a:srgbClr val="1F3857"/>
+                </a:solidFill>
+              </a:rPr>
+              <a:t>•  The earlier three-channel decomposition is withdrawn — it was measured on a grid where Composite held the true kernel.</a:t>
+            </a:r>
+          </a:p>
+        </p:txBody>
+      </p:sp>
+      <p:sp>
+        <p:nvSpPr>
+          <p:cNvPr id="8" name="TextBox 7"/>
+          <p:cNvSpPr txBox="1"/>
+          <p:nvPr/>
+        </p:nvSpPr>
+        <p:spPr>
+          <a:xfrm>
+            <a:off x="685800" y="5897880"/>
             <a:ext cx="10789920" cy="457200"/>
           </a:xfrm>
           <a:prstGeom prst="rect">
@@ -4588,7 +6567,7 @@
                   <a:srgbClr val="1F3857"/>
                 </a:solidFill>
               </a:rPr>
-              <a:t>Three findings</a:t>
+              <a:t>Four findings</a:t>
             </a:r>
           </a:p>
         </p:txBody>
@@ -4635,7 +6614,7 @@
         </p:nvSpPr>
         <p:spPr>
           <a:xfrm>
-            <a:off x="685800" y="1463040"/>
+            <a:off x="685800" y="1234440"/>
             <a:ext cx="10789920" cy="457200"/>
           </a:xfrm>
           <a:prstGeom prst="rect">
@@ -4651,7 +6630,7 @@
           <a:p>
             <a:pPr algn="l"/>
             <a:r>
-              <a:rPr sz="1800" b="1">
+              <a:rPr sz="1700" b="1">
                 <a:solidFill>
                   <a:srgbClr val="1F3857"/>
                 </a:solidFill>
@@ -4669,7 +6648,7 @@
         </p:nvSpPr>
         <p:spPr>
           <a:xfrm>
-            <a:off x="685800" y="2029968"/>
+            <a:off x="685800" y="1746504"/>
             <a:ext cx="10789920" cy="457200"/>
           </a:xfrm>
           <a:prstGeom prst="rect">
@@ -4685,7 +6664,7 @@
           <a:p>
             <a:pPr algn="l"/>
             <a:r>
-              <a:rPr sz="1800" b="0">
+              <a:rPr sz="1700" b="0">
                 <a:solidFill>
                   <a:srgbClr val="555F6B"/>
                 </a:solidFill>
@@ -4703,7 +6682,7 @@
         </p:nvSpPr>
         <p:spPr>
           <a:xfrm>
-            <a:off x="685800" y="2596896"/>
+            <a:off x="685800" y="2258568"/>
             <a:ext cx="10789920" cy="457200"/>
           </a:xfrm>
           <a:prstGeom prst="rect">
@@ -4719,7 +6698,7 @@
           <a:p>
             <a:pPr algn="l"/>
             <a:r>
-              <a:rPr sz="1800" b="1">
+              <a:rPr sz="1700" b="1">
                 <a:solidFill>
                   <a:srgbClr val="1F3857"/>
                 </a:solidFill>
@@ -4737,7 +6716,7 @@
         </p:nvSpPr>
         <p:spPr>
           <a:xfrm>
-            <a:off x="685800" y="3163824"/>
+            <a:off x="685800" y="2770632"/>
             <a:ext cx="10789920" cy="457200"/>
           </a:xfrm>
           <a:prstGeom prst="rect">
@@ -4753,7 +6732,7 @@
           <a:p>
             <a:pPr algn="l"/>
             <a:r>
-              <a:rPr sz="1800" b="0">
+              <a:rPr sz="1700" b="0">
                 <a:solidFill>
                   <a:srgbClr val="555F6B"/>
                 </a:solidFill>
@@ -4771,7 +6750,7 @@
         </p:nvSpPr>
         <p:spPr>
           <a:xfrm>
-            <a:off x="685800" y="3730752"/>
+            <a:off x="685800" y="3282696"/>
             <a:ext cx="10789920" cy="457200"/>
           </a:xfrm>
           <a:prstGeom prst="rect">
@@ -4787,7 +6766,7 @@
           <a:p>
             <a:pPr algn="l"/>
             <a:r>
-              <a:rPr sz="1800" b="1">
+              <a:rPr sz="1700" b="1">
                 <a:solidFill>
                   <a:srgbClr val="1F3857"/>
                 </a:solidFill>
@@ -4805,7 +6784,7 @@
         </p:nvSpPr>
         <p:spPr>
           <a:xfrm>
-            <a:off x="685800" y="4297680"/>
+            <a:off x="685800" y="3794760"/>
             <a:ext cx="10789920" cy="457200"/>
           </a:xfrm>
           <a:prstGeom prst="rect">
@@ -4821,12 +6800,80 @@
           <a:p>
             <a:pPr algn="l"/>
             <a:r>
-              <a:rPr sz="1800" b="0">
+              <a:rPr sz="1700" b="0">
                 <a:solidFill>
                   <a:srgbClr val="555F6B"/>
                 </a:solidFill>
               </a:rPr>
               <a:t>n̄ is uncorrelated with the size of the gain (r = −0.12). Flatness of g at its own optimum predicts it (r = +0.78).</a:t>
+            </a:r>
+          </a:p>
+        </p:txBody>
+      </p:sp>
+      <p:sp>
+        <p:nvSpPr>
+          <p:cNvPr id="10" name="TextBox 9"/>
+          <p:cNvSpPr txBox="1"/>
+          <p:nvPr/>
+        </p:nvSpPr>
+        <p:spPr>
+          <a:xfrm>
+            <a:off x="685800" y="4306824"/>
+            <a:ext cx="10789920" cy="457200"/>
+          </a:xfrm>
+          <a:prstGeom prst="rect">
+            <a:avLst/>
+          </a:prstGeom>
+          <a:noFill/>
+        </p:spPr>
+        <p:txBody>
+          <a:bodyPr wrap="square">
+            <a:spAutoFit/>
+          </a:bodyPr>
+          <a:lstStyle/>
+          <a:p>
+            <a:pPr algn="l"/>
+            <a:r>
+              <a:rPr sz="1700" b="1">
+                <a:solidFill>
+                  <a:srgbClr val="1F3857"/>
+                </a:solidFill>
+              </a:rPr>
+              <a:t>•  4.  And none of the magnitudes survive two objectives.</a:t>
+            </a:r>
+          </a:p>
+        </p:txBody>
+      </p:sp>
+      <p:sp>
+        <p:nvSpPr>
+          <p:cNvPr id="11" name="TextBox 10"/>
+          <p:cNvSpPr txBox="1"/>
+          <p:nvPr/>
+        </p:nvSpPr>
+        <p:spPr>
+          <a:xfrm>
+            <a:off x="685800" y="4818888"/>
+            <a:ext cx="10789920" cy="457200"/>
+          </a:xfrm>
+          <a:prstGeom prst="rect">
+            <a:avLst/>
+          </a:prstGeom>
+          <a:noFill/>
+        </p:spPr>
+        <p:txBody>
+          <a:bodyPr wrap="square">
+            <a:spAutoFit/>
+          </a:bodyPr>
+          <a:lstStyle/>
+          <a:p>
+            <a:pPr algn="l"/>
+            <a:r>
+              <a:rPr sz="1700" b="0">
+                <a:solidFill>
+                  <a:srgbClr val="555F6B"/>
+                </a:solidFill>
+              </a:rPr>
+              <a:t>The same 17 maps under hypervolume give gains uncorrelated with their single-objective ones (r = −0.19), and the plateau measure stops working (r = −0.36). The bijective split still shows, weakly.</a:t>
             </a:r>
           </a:p>
         </p:txBody>

--- a/slides/composite_matern.pptx
+++ b/slides/composite_matern.pptx
@@ -3423,7 +3423,7 @@
                   <a:srgbClr val="555F6B"/>
                 </a:solidFill>
               </a:rPr>
-              <a:t>•  shiftsq_c3 = (h−3)² separates the two explanations: its fold sits at h = 3, the edge of h's range, so n̄ ≈ 1 — but its minimum is exactly at that fold, where g is flat.</a:t>
+              <a:t>•  Bijectivity and the plateau agree on the sign everywhere, so they separate on magnitude: root3 and root5 are non-bijective with high n̄ and no plateau, and gain +0.26 and +0.42 against +2.05 for the maps that have one.</a:t>
             </a:r>
           </a:p>
         </p:txBody>
@@ -3457,7 +3457,7 @@
                   <a:srgbClr val="555F6B"/>
                 </a:solidFill>
               </a:rPr>
-              <a:t>•  n̄ averages over all y, dominated by regions far from the optimum. The plateau measure looks only at the optimum.</a:t>
+              <a:t>•  shiftsq_c3 = (h−3)² shows it in reverse: n̄ = 1.01, so it hides almost nothing — but its minimum is exactly at the fold, where g is flat, and it gains +2.36.</a:t>
             </a:r>
           </a:p>
         </p:txBody>
@@ -5244,7 +5244,7 @@
                             <a:srgbClr val="1F3857"/>
                           </a:solidFill>
                         </a:rPr>
-                        <a:t>yes</a:t>
+                        <a:t>no</a:t>
                       </a:r>
                     </a:p>
                   </a:txBody>
@@ -6059,7 +6059,7 @@
                             <a:srgbClr val="1F3857"/>
                           </a:solidFill>
                         </a:rPr>
-                        <a:t>bijective (n=6)</a:t>
+                        <a:t>bijective (n=5)</a:t>
                       </a:r>
                     </a:p>
                   </a:txBody>
@@ -6077,7 +6077,7 @@
                             <a:srgbClr val="1F3857"/>
                           </a:solidFill>
                         </a:rPr>
-                        <a:t>+0.45,  0 of 6 significant</a:t>
+                        <a:t>+0.07,  0 of 5 significant</a:t>
                       </a:r>
                     </a:p>
                   </a:txBody>
@@ -6095,7 +6095,7 @@
                             <a:srgbClr val="1F3857"/>
                           </a:solidFill>
                         </a:rPr>
-                        <a:t>+1.19%,  0 of 6 significant</a:t>
+                        <a:t>+1.09%,  0 of 5 significant</a:t>
                       </a:r>
                     </a:p>
                   </a:txBody>
@@ -6115,7 +6115,7 @@
                             <a:srgbClr val="1F3857"/>
                           </a:solidFill>
                         </a:rPr>
-                        <a:t>not bijective (n=11)</a:t>
+                        <a:t>not bijective (n=12)</a:t>
                       </a:r>
                     </a:p>
                   </a:txBody>
@@ -6133,7 +6133,7 @@
                             <a:srgbClr val="1F3857"/>
                           </a:solidFill>
                         </a:rPr>
-                        <a:t>+1.80,  10 of 11</a:t>
+                        <a:t>+1.84,  11 of 12</a:t>
                       </a:r>
                     </a:p>
                   </a:txBody>
@@ -6151,7 +6151,7 @@
                             <a:srgbClr val="1F3857"/>
                           </a:solidFill>
                         </a:rPr>
-                        <a:t>+4.28%,  5 of 11</a:t>
+                        <a:t>+4.06%,  5 of 12</a:t>
                       </a:r>
                     </a:p>
                   </a:txBody>
@@ -6345,7 +6345,7 @@
                   <a:srgbClr val="1F3857"/>
                 </a:solidFill>
               </a:rPr>
-              <a:t>•  The proposition's prediction holds. Bijective g: no gain, in 5 of 6 cases. Non-bijective g: a gain every time. The same split appears with two objectives, weaker.</a:t>
+              <a:t>•  The proposition's prediction holds. Bijective g: no gain, in all 5 cases. Non-bijective g: a gain every time. The same split appears with two objectives, weaker.</a:t>
             </a:r>
           </a:p>
         </p:txBody>
@@ -6379,7 +6379,7 @@
                   <a:srgbClr val="1F3857"/>
                 </a:solidFill>
               </a:rPr>
-              <a:t>•  Its stated reason does not. n̄ is uncorrelated with the gain, sum destroys information and gains nothing, shiftsq_c3 preserves it and gains a great deal.</a:t>
+              <a:t>•  Its stated reason does not. n̄ is uncorrelated with the gain: sum destroys information and gains nothing, root3 and root5 have the highest n̄ in their group and the smallest gains in it, and shiftsq_c3 hides almost nothing and gains a great deal.</a:t>
             </a:r>
           </a:p>
         </p:txBody>
@@ -6737,7 +6737,7 @@
                   <a:srgbClr val="555F6B"/>
                 </a:solidFill>
               </a:rPr>
-              <a:t>All 10 non-bijective maps gain, every one significant. 5 of 6 bijective maps do not.</a:t>
+              <a:t>All 11 non-bijective maps gain, every one significant. None of the 5 bijective maps do.</a:t>
             </a:r>
           </a:p>
         </p:txBody>
@@ -7929,7 +7929,7 @@
                   <a:srgbClr val="555F6B"/>
                 </a:solidFill>
               </a:rPr>
-              <a:t>Excluding them takes the non-bijective group from 10 significant rows out of 13 to 10 out of 10. The criterion is smoothness of g, decided independently of the result — but both versions are reported.</a:t>
+              <a:t>Excluding them takes the non-bijective group from 11 significant rows out of 13 to 10 out of 10. The criterion is smoothness of g, decided independently of the result — but both versions are reported.</a:t>
             </a:r>
           </a:p>
         </p:txBody>
@@ -8046,7 +8046,7 @@
                 <a:gridCol w="1600200"/>
                 <a:gridCol w="1600200"/>
               </a:tblGrid>
-              <a:tr h="391885">
+              <a:tr h="457200">
                 <a:tc>
                   <a:txBody>
                     <a:bodyPr/>
@@ -8156,117 +8156,117 @@
                   <a:tcPr marT="18000" marB="18000"/>
                 </a:tc>
               </a:tr>
-              <a:tr h="391885">
-                <a:tc>
-                  <a:txBody>
-                    <a:bodyPr/>
-                    <a:lstStyle/>
-                    <a:p>
-                      <a:pPr algn="l"/>
-                      <a:r>
-                        <a:rPr sz="1500" b="1">
-                          <a:solidFill>
-                            <a:srgbClr val="8A2B2B"/>
-                          </a:solidFill>
-                        </a:rPr>
-                        <a:t>shiftsq_c3</a:t>
-                      </a:r>
-                    </a:p>
-                  </a:txBody>
-                  <a:tcPr marT="18000" marB="18000"/>
-                </a:tc>
-                <a:tc>
-                  <a:txBody>
-                    <a:bodyPr/>
-                    <a:lstStyle/>
-                    <a:p>
-                      <a:pPr algn="r"/>
-                      <a:r>
-                        <a:rPr sz="1500" b="1">
-                          <a:solidFill>
-                            <a:srgbClr val="8A2B2B"/>
-                          </a:solidFill>
-                        </a:rPr>
-                        <a:t>1.01</a:t>
-                      </a:r>
-                    </a:p>
-                  </a:txBody>
-                  <a:tcPr marT="18000" marB="18000"/>
-                </a:tc>
-                <a:tc>
-                  <a:txBody>
-                    <a:bodyPr/>
-                    <a:lstStyle/>
-                    <a:p>
-                      <a:pPr algn="r"/>
-                      <a:r>
-                        <a:rPr sz="1500" b="1">
-                          <a:solidFill>
-                            <a:srgbClr val="8A2B2B"/>
-                          </a:solidFill>
-                        </a:rPr>
-                        <a:t>-4.694</a:t>
-                      </a:r>
-                    </a:p>
-                  </a:txBody>
-                  <a:tcPr marT="18000" marB="18000"/>
-                </a:tc>
-                <a:tc>
-                  <a:txBody>
-                    <a:bodyPr/>
-                    <a:lstStyle/>
-                    <a:p>
-                      <a:pPr algn="r"/>
-                      <a:r>
-                        <a:rPr sz="1500" b="1">
-                          <a:solidFill>
-                            <a:srgbClr val="8A2B2B"/>
-                          </a:solidFill>
-                        </a:rPr>
-                        <a:t>-7.053</a:t>
-                      </a:r>
-                    </a:p>
-                  </a:txBody>
-                  <a:tcPr marT="18000" marB="18000"/>
-                </a:tc>
-                <a:tc>
-                  <a:txBody>
-                    <a:bodyPr/>
-                    <a:lstStyle/>
-                    <a:p>
-                      <a:pPr algn="r"/>
-                      <a:r>
-                        <a:rPr sz="1500" b="1">
-                          <a:solidFill>
-                            <a:srgbClr val="8A2B2B"/>
-                          </a:solidFill>
-                        </a:rPr>
-                        <a:t>+2.359</a:t>
-                      </a:r>
-                    </a:p>
-                  </a:txBody>
-                  <a:tcPr marT="18000" marB="18000"/>
-                </a:tc>
-                <a:tc>
-                  <a:txBody>
-                    <a:bodyPr/>
-                    <a:lstStyle/>
-                    <a:p>
-                      <a:pPr algn="r"/>
-                      <a:r>
-                        <a:rPr sz="1500" b="1">
-                          <a:solidFill>
-                            <a:srgbClr val="8A2B2B"/>
-                          </a:solidFill>
-                        </a:rPr>
-                        <a:t>&lt;0.001</a:t>
+              <a:tr h="457200">
+                <a:tc>
+                  <a:txBody>
+                    <a:bodyPr/>
+                    <a:lstStyle/>
+                    <a:p>
+                      <a:pPr algn="l"/>
+                      <a:r>
+                        <a:rPr sz="1500" b="0">
+                          <a:solidFill>
+                            <a:srgbClr val="1F3857"/>
+                          </a:solidFill>
+                        </a:rPr>
+                        <a:t>exp_b1</a:t>
+                      </a:r>
+                    </a:p>
+                  </a:txBody>
+                  <a:tcPr marT="18000" marB="18000"/>
+                </a:tc>
+                <a:tc>
+                  <a:txBody>
+                    <a:bodyPr/>
+                    <a:lstStyle/>
+                    <a:p>
+                      <a:pPr algn="r"/>
+                      <a:r>
+                        <a:rPr sz="1500" b="0">
+                          <a:solidFill>
+                            <a:srgbClr val="1F3857"/>
+                          </a:solidFill>
+                        </a:rPr>
+                        <a:t>1.00</a:t>
+                      </a:r>
+                    </a:p>
+                  </a:txBody>
+                  <a:tcPr marT="18000" marB="18000"/>
+                </a:tc>
+                <a:tc>
+                  <a:txBody>
+                    <a:bodyPr/>
+                    <a:lstStyle/>
+                    <a:p>
+                      <a:pPr algn="r"/>
+                      <a:r>
+                        <a:rPr sz="1500" b="0">
+                          <a:solidFill>
+                            <a:srgbClr val="1F3857"/>
+                          </a:solidFill>
+                        </a:rPr>
+                        <a:t>-2.594</a:t>
+                      </a:r>
+                    </a:p>
+                  </a:txBody>
+                  <a:tcPr marT="18000" marB="18000"/>
+                </a:tc>
+                <a:tc>
+                  <a:txBody>
+                    <a:bodyPr/>
+                    <a:lstStyle/>
+                    <a:p>
+                      <a:pPr algn="r"/>
+                      <a:r>
+                        <a:rPr sz="1500" b="0">
+                          <a:solidFill>
+                            <a:srgbClr val="1F3857"/>
+                          </a:solidFill>
+                        </a:rPr>
+                        <a:t>-2.742</a:t>
+                      </a:r>
+                    </a:p>
+                  </a:txBody>
+                  <a:tcPr marT="18000" marB="18000"/>
+                </a:tc>
+                <a:tc>
+                  <a:txBody>
+                    <a:bodyPr/>
+                    <a:lstStyle/>
+                    <a:p>
+                      <a:pPr algn="r"/>
+                      <a:r>
+                        <a:rPr sz="1500" b="0">
+                          <a:solidFill>
+                            <a:srgbClr val="1F3857"/>
+                          </a:solidFill>
+                        </a:rPr>
+                        <a:t>+0.148</a:t>
+                      </a:r>
+                    </a:p>
+                  </a:txBody>
+                  <a:tcPr marT="18000" marB="18000"/>
+                </a:tc>
+                <a:tc>
+                  <a:txBody>
+                    <a:bodyPr/>
+                    <a:lstStyle/>
+                    <a:p>
+                      <a:pPr algn="r"/>
+                      <a:r>
+                        <a:rPr sz="1500" b="0">
+                          <a:solidFill>
+                            <a:srgbClr val="1F3857"/>
+                          </a:solidFill>
+                        </a:rPr>
+                        <a:t>0.109</a:t>
                       </a:r>
                     </a:p>
                   </a:txBody>
                   <a:tcPr marT="18000" marB="18000"/>
                 </a:tc>
               </a:tr>
-              <a:tr h="391885">
+              <a:tr h="457200">
                 <a:tc>
                   <a:txBody>
                     <a:bodyPr/>
@@ -8279,7 +8279,7 @@
                             <a:srgbClr val="1F3857"/>
                           </a:solidFill>
                         </a:rPr>
-                        <a:t>exp_b1</a:t>
+                        <a:t>identity</a:t>
                       </a:r>
                     </a:p>
                   </a:txBody>
@@ -8315,7 +8315,7 @@
                             <a:srgbClr val="1F3857"/>
                           </a:solidFill>
                         </a:rPr>
-                        <a:t>-2.594</a:t>
+                        <a:t>-1.027</a:t>
                       </a:r>
                     </a:p>
                   </a:txBody>
@@ -8333,7 +8333,7 @@
                             <a:srgbClr val="1F3857"/>
                           </a:solidFill>
                         </a:rPr>
-                        <a:t>-2.742</a:t>
+                        <a:t>-1.114</a:t>
                       </a:r>
                     </a:p>
                   </a:txBody>
@@ -8351,7 +8351,7 @@
                             <a:srgbClr val="1F3857"/>
                           </a:solidFill>
                         </a:rPr>
-                        <a:t>+0.148</a:t>
+                        <a:t>+0.087</a:t>
                       </a:r>
                     </a:p>
                   </a:txBody>
@@ -8369,14 +8369,14 @@
                             <a:srgbClr val="1F3857"/>
                           </a:solidFill>
                         </a:rPr>
-                        <a:t>0.109</a:t>
+                        <a:t>0.291</a:t>
                       </a:r>
                     </a:p>
                   </a:txBody>
                   <a:tcPr marT="18000" marB="18000"/>
                 </a:tc>
               </a:tr>
-              <a:tr h="391885">
+              <a:tr h="457200">
                 <a:tc>
                   <a:txBody>
                     <a:bodyPr/>
@@ -8389,7 +8389,7 @@
                             <a:srgbClr val="1F3857"/>
                           </a:solidFill>
                         </a:rPr>
-                        <a:t>identity</a:t>
+                        <a:t>mono3</a:t>
                       </a:r>
                     </a:p>
                   </a:txBody>
@@ -8425,7 +8425,7 @@
                             <a:srgbClr val="1F3857"/>
                           </a:solidFill>
                         </a:rPr>
-                        <a:t>-1.027</a:t>
+                        <a:t>+0.093</a:t>
                       </a:r>
                     </a:p>
                   </a:txBody>
@@ -8443,7 +8443,7 @@
                             <a:srgbClr val="1F3857"/>
                           </a:solidFill>
                         </a:rPr>
-                        <a:t>-1.114</a:t>
+                        <a:t>+0.012</a:t>
                       </a:r>
                     </a:p>
                   </a:txBody>
@@ -8461,7 +8461,7 @@
                             <a:srgbClr val="1F3857"/>
                           </a:solidFill>
                         </a:rPr>
-                        <a:t>+0.087</a:t>
+                        <a:t>+0.081</a:t>
                       </a:r>
                     </a:p>
                   </a:txBody>
@@ -8479,14 +8479,14 @@
                             <a:srgbClr val="1F3857"/>
                           </a:solidFill>
                         </a:rPr>
-                        <a:t>0.291</a:t>
+                        <a:t>0.235</a:t>
                       </a:r>
                     </a:p>
                   </a:txBody>
                   <a:tcPr marT="18000" marB="18000"/>
                 </a:tc>
               </a:tr>
-              <a:tr h="391885">
+              <a:tr h="457200">
                 <a:tc>
                   <a:txBody>
                     <a:bodyPr/>
@@ -8499,7 +8499,7 @@
                             <a:srgbClr val="1F3857"/>
                           </a:solidFill>
                         </a:rPr>
-                        <a:t>mono3</a:t>
+                        <a:t>sinh_b1</a:t>
                       </a:r>
                     </a:p>
                   </a:txBody>
@@ -8535,7 +8535,7 @@
                             <a:srgbClr val="1F3857"/>
                           </a:solidFill>
                         </a:rPr>
-                        <a:t>+0.093</a:t>
+                        <a:t>+0.245</a:t>
                       </a:r>
                     </a:p>
                   </a:txBody>
@@ -8553,7 +8553,7 @@
                             <a:srgbClr val="1F3857"/>
                           </a:solidFill>
                         </a:rPr>
-                        <a:t>+0.012</a:t>
+                        <a:t>+0.164</a:t>
                       </a:r>
                     </a:p>
                   </a:txBody>
@@ -8589,124 +8589,14 @@
                             <a:srgbClr val="1F3857"/>
                           </a:solidFill>
                         </a:rPr>
-                        <a:t>0.235</a:t>
+                        <a:t>0.220</a:t>
                       </a:r>
                     </a:p>
                   </a:txBody>
                   <a:tcPr marT="18000" marB="18000"/>
                 </a:tc>
               </a:tr>
-              <a:tr h="391885">
-                <a:tc>
-                  <a:txBody>
-                    <a:bodyPr/>
-                    <a:lstStyle/>
-                    <a:p>
-                      <a:pPr algn="l"/>
-                      <a:r>
-                        <a:rPr sz="1500" b="0">
-                          <a:solidFill>
-                            <a:srgbClr val="1F3857"/>
-                          </a:solidFill>
-                        </a:rPr>
-                        <a:t>sinh_b1</a:t>
-                      </a:r>
-                    </a:p>
-                  </a:txBody>
-                  <a:tcPr marT="18000" marB="18000"/>
-                </a:tc>
-                <a:tc>
-                  <a:txBody>
-                    <a:bodyPr/>
-                    <a:lstStyle/>
-                    <a:p>
-                      <a:pPr algn="r"/>
-                      <a:r>
-                        <a:rPr sz="1500" b="0">
-                          <a:solidFill>
-                            <a:srgbClr val="1F3857"/>
-                          </a:solidFill>
-                        </a:rPr>
-                        <a:t>1.00</a:t>
-                      </a:r>
-                    </a:p>
-                  </a:txBody>
-                  <a:tcPr marT="18000" marB="18000"/>
-                </a:tc>
-                <a:tc>
-                  <a:txBody>
-                    <a:bodyPr/>
-                    <a:lstStyle/>
-                    <a:p>
-                      <a:pPr algn="r"/>
-                      <a:r>
-                        <a:rPr sz="1500" b="0">
-                          <a:solidFill>
-                            <a:srgbClr val="1F3857"/>
-                          </a:solidFill>
-                        </a:rPr>
-                        <a:t>+0.245</a:t>
-                      </a:r>
-                    </a:p>
-                  </a:txBody>
-                  <a:tcPr marT="18000" marB="18000"/>
-                </a:tc>
-                <a:tc>
-                  <a:txBody>
-                    <a:bodyPr/>
-                    <a:lstStyle/>
-                    <a:p>
-                      <a:pPr algn="r"/>
-                      <a:r>
-                        <a:rPr sz="1500" b="0">
-                          <a:solidFill>
-                            <a:srgbClr val="1F3857"/>
-                          </a:solidFill>
-                        </a:rPr>
-                        <a:t>+0.164</a:t>
-                      </a:r>
-                    </a:p>
-                  </a:txBody>
-                  <a:tcPr marT="18000" marB="18000"/>
-                </a:tc>
-                <a:tc>
-                  <a:txBody>
-                    <a:bodyPr/>
-                    <a:lstStyle/>
-                    <a:p>
-                      <a:pPr algn="r"/>
-                      <a:r>
-                        <a:rPr sz="1500" b="0">
-                          <a:solidFill>
-                            <a:srgbClr val="1F3857"/>
-                          </a:solidFill>
-                        </a:rPr>
-                        <a:t>+0.081</a:t>
-                      </a:r>
-                    </a:p>
-                  </a:txBody>
-                  <a:tcPr marT="18000" marB="18000"/>
-                </a:tc>
-                <a:tc>
-                  <a:txBody>
-                    <a:bodyPr/>
-                    <a:lstStyle/>
-                    <a:p>
-                      <a:pPr algn="r"/>
-                      <a:r>
-                        <a:rPr sz="1500" b="0">
-                          <a:solidFill>
-                            <a:srgbClr val="1F3857"/>
-                          </a:solidFill>
-                        </a:rPr>
-                        <a:t>0.220</a:t>
-                      </a:r>
-                    </a:p>
-                  </a:txBody>
-                  <a:tcPr marT="18000" marB="18000"/>
-                </a:tc>
-              </a:tr>
-              <a:tr h="391890">
+              <a:tr h="457200">
                 <a:tc>
                   <a:txBody>
                     <a:bodyPr/>
@@ -8849,7 +8739,7 @@
                   <a:srgbClr val="555F6B"/>
                 </a:solidFill>
               </a:rPr>
-              <a:t>Five of six show nothing. shiftsq_c3 is the exception — and it is the key to the mechanism.</a:t>
+              <a:t>All five show nothing. The largest gain in the group is +0.148, and it is not significant.</a:t>
             </a:r>
           </a:p>
         </p:txBody>
@@ -8966,7 +8856,7 @@
                 <a:gridCol w="1600200"/>
                 <a:gridCol w="1600200"/>
               </a:tblGrid>
-              <a:tr h="365760">
+              <a:tr h="335280">
                 <a:tc>
                   <a:txBody>
                     <a:bodyPr/>
@@ -9076,7 +8966,7 @@
                   <a:tcPr marT="18000" marB="18000"/>
                 </a:tc>
               </a:tr>
-              <a:tr h="365760">
+              <a:tr h="335280">
                 <a:tc>
                   <a:txBody>
                     <a:bodyPr/>
@@ -9186,7 +9076,7 @@
                   <a:tcPr marT="18000" marB="18000"/>
                 </a:tc>
               </a:tr>
-              <a:tr h="365760">
+              <a:tr h="335280">
                 <a:tc>
                   <a:txBody>
                     <a:bodyPr/>
@@ -9296,7 +9186,7 @@
                   <a:tcPr marT="18000" marB="18000"/>
                 </a:tc>
               </a:tr>
-              <a:tr h="365760">
+              <a:tr h="335280">
                 <a:tc>
                   <a:txBody>
                     <a:bodyPr/>
@@ -9406,7 +9296,7 @@
                   <a:tcPr marT="18000" marB="18000"/>
                 </a:tc>
               </a:tr>
-              <a:tr h="365760">
+              <a:tr h="335280">
                 <a:tc>
                   <a:txBody>
                     <a:bodyPr/>
@@ -9516,7 +9406,7 @@
                   <a:tcPr marT="18000" marB="18000"/>
                 </a:tc>
               </a:tr>
-              <a:tr h="365760">
+              <a:tr h="335280">
                 <a:tc>
                   <a:txBody>
                     <a:bodyPr/>
@@ -9626,7 +9516,117 @@
                   <a:tcPr marT="18000" marB="18000"/>
                 </a:tc>
               </a:tr>
-              <a:tr h="365760">
+              <a:tr h="335280">
+                <a:tc>
+                  <a:txBody>
+                    <a:bodyPr/>
+                    <a:lstStyle/>
+                    <a:p>
+                      <a:pPr algn="l"/>
+                      <a:r>
+                        <a:rPr sz="1400" b="1">
+                          <a:solidFill>
+                            <a:srgbClr val="8A2B2B"/>
+                          </a:solidFill>
+                        </a:rPr>
+                        <a:t>shiftsq_c3</a:t>
+                      </a:r>
+                    </a:p>
+                  </a:txBody>
+                  <a:tcPr marT="18000" marB="18000"/>
+                </a:tc>
+                <a:tc>
+                  <a:txBody>
+                    <a:bodyPr/>
+                    <a:lstStyle/>
+                    <a:p>
+                      <a:pPr algn="r"/>
+                      <a:r>
+                        <a:rPr sz="1400" b="1">
+                          <a:solidFill>
+                            <a:srgbClr val="8A2B2B"/>
+                          </a:solidFill>
+                        </a:rPr>
+                        <a:t>1.01</a:t>
+                      </a:r>
+                    </a:p>
+                  </a:txBody>
+                  <a:tcPr marT="18000" marB="18000"/>
+                </a:tc>
+                <a:tc>
+                  <a:txBody>
+                    <a:bodyPr/>
+                    <a:lstStyle/>
+                    <a:p>
+                      <a:pPr algn="r"/>
+                      <a:r>
+                        <a:rPr sz="1400" b="1">
+                          <a:solidFill>
+                            <a:srgbClr val="8A2B2B"/>
+                          </a:solidFill>
+                        </a:rPr>
+                        <a:t>-4.694</a:t>
+                      </a:r>
+                    </a:p>
+                  </a:txBody>
+                  <a:tcPr marT="18000" marB="18000"/>
+                </a:tc>
+                <a:tc>
+                  <a:txBody>
+                    <a:bodyPr/>
+                    <a:lstStyle/>
+                    <a:p>
+                      <a:pPr algn="r"/>
+                      <a:r>
+                        <a:rPr sz="1400" b="1">
+                          <a:solidFill>
+                            <a:srgbClr val="8A2B2B"/>
+                          </a:solidFill>
+                        </a:rPr>
+                        <a:t>-7.053</a:t>
+                      </a:r>
+                    </a:p>
+                  </a:txBody>
+                  <a:tcPr marT="18000" marB="18000"/>
+                </a:tc>
+                <a:tc>
+                  <a:txBody>
+                    <a:bodyPr/>
+                    <a:lstStyle/>
+                    <a:p>
+                      <a:pPr algn="r"/>
+                      <a:r>
+                        <a:rPr sz="1400" b="1">
+                          <a:solidFill>
+                            <a:srgbClr val="8A2B2B"/>
+                          </a:solidFill>
+                        </a:rPr>
+                        <a:t>+2.359</a:t>
+                      </a:r>
+                    </a:p>
+                  </a:txBody>
+                  <a:tcPr marT="18000" marB="18000"/>
+                </a:tc>
+                <a:tc>
+                  <a:txBody>
+                    <a:bodyPr/>
+                    <a:lstStyle/>
+                    <a:p>
+                      <a:pPr algn="r"/>
+                      <a:r>
+                        <a:rPr sz="1400" b="1">
+                          <a:solidFill>
+                            <a:srgbClr val="8A2B2B"/>
+                          </a:solidFill>
+                        </a:rPr>
+                        <a:t>&lt;0.001</a:t>
+                      </a:r>
+                    </a:p>
+                  </a:txBody>
+                  <a:tcPr marT="18000" marB="18000"/>
+                </a:tc>
+              </a:tr>
+              <a:tr h="335280">
                 <a:tc>
                   <a:txBody>
                     <a:bodyPr/>
@@ -9736,7 +9736,7 @@
                   <a:tcPr marT="18000" marB="18000"/>
                 </a:tc>
               </a:tr>
-              <a:tr h="365760">
+              <a:tr h="335280">
                 <a:tc>
                   <a:txBody>
                     <a:bodyPr/>
@@ -9846,7 +9846,7 @@
                   <a:tcPr marT="18000" marB="18000"/>
                 </a:tc>
               </a:tr>
-              <a:tr h="365760">
+              <a:tr h="335280">
                 <a:tc>
                   <a:txBody>
                     <a:bodyPr/>
@@ -9956,7 +9956,7 @@
                   <a:tcPr marT="18000" marB="18000"/>
                 </a:tc>
               </a:tr>
-              <a:tr h="365760">
+              <a:tr h="335280">
                 <a:tc>
                   <a:txBody>
                     <a:bodyPr/>
@@ -10066,7 +10066,7 @@
                   <a:tcPr marT="18000" marB="18000"/>
                 </a:tc>
               </a:tr>
-              <a:tr h="365760">
+              <a:tr h="335280">
                 <a:tc>
                   <a:txBody>
                     <a:bodyPr/>
@@ -10209,7 +10209,7 @@
                   <a:srgbClr val="2B6CB0"/>
                 </a:solidFill>
               </a:rPr>
-              <a:t>mean gain:  non-bijective +1.98   vs   bijective +0.45 (and that is almost all shiftsq_c3)</a:t>
+              <a:t>mean gain:  non-bijective +2.01   vs   bijective +0.07      shiftsq_c3 (red) has n̄ = 1.01 — a real fold, rarely hit</a:t>
             </a:r>
           </a:p>
         </p:txBody>
@@ -10835,7 +10835,7 @@
                             <a:srgbClr val="1F3857"/>
                           </a:solidFill>
                         </a:rPr>
-                        <a:t>yes</a:t>
+                        <a:t>no</a:t>
                       </a:r>
                     </a:p>
                   </a:txBody>

--- a/slides/composite_matern.pptx
+++ b/slides/composite_matern.pptx
@@ -10316,8 +10316,8 @@
         </p:blipFill>
         <p:spPr>
           <a:xfrm>
-            <a:off x="2165698" y="1325880"/>
-            <a:ext cx="7860298" cy="5394960"/>
+            <a:off x="900360" y="1325880"/>
+            <a:ext cx="10390975" cy="5394960"/>
           </a:xfrm>
           <a:prstGeom prst="rect">
             <a:avLst/>

--- a/slides/composite_matern.pptx
+++ b/slides/composite_matern.pptx
@@ -21,6 +21,7 @@
     <p:sldId id="269" r:id="rId20"/>
     <p:sldId id="270" r:id="rId21"/>
     <p:sldId id="271" r:id="rId22"/>
+    <p:sldId id="272" r:id="rId23"/>
   </p:sldIdLst>
   <p:sldSz cx="12191695" cy="6858000" type="screen4x3"/>
   <p:notesSz cx="6858000" cy="9144000"/>
@@ -5486,6 +5487,150 @@
                   <a:srgbClr val="1F3857"/>
                 </a:solidFill>
               </a:rPr>
+              <a:t>Convergence under hypervolume</a:t>
+            </a:r>
+          </a:p>
+        </p:txBody>
+      </p:sp>
+      <p:sp>
+        <p:nvSpPr>
+          <p:cNvPr id="3" name="TextBox 2"/>
+          <p:cNvSpPr txBox="1"/>
+          <p:nvPr/>
+        </p:nvSpPr>
+        <p:spPr>
+          <a:xfrm>
+            <a:off x="502920" y="960120"/>
+            <a:ext cx="11155680" cy="457200"/>
+          </a:xfrm>
+          <a:prstGeom prst="rect">
+            <a:avLst/>
+          </a:prstGeom>
+          <a:noFill/>
+        </p:spPr>
+        <p:txBody>
+          <a:bodyPr wrap="square">
+            <a:spAutoFit/>
+          </a:bodyPr>
+          <a:lstStyle/>
+          <a:p>
+            <a:pPr algn="l"/>
+            <a:r>
+              <a:rPr sz="1500" b="0">
+                <a:solidFill>
+                  <a:srgbClr val="555F6B"/>
+                </a:solidFill>
+              </a:rPr>
+              <a:t>median with interquartile band, each run relative to its own initial design; bijective left of the rule</a:t>
+            </a:r>
+          </a:p>
+        </p:txBody>
+      </p:sp>
+      <p:pic>
+        <p:nvPicPr>
+          <p:cNvPr id="4" name="Picture 3" descr="hv_curves.png"/>
+          <p:cNvPicPr>
+            <a:picLocks noChangeAspect="1"/>
+          </p:cNvPicPr>
+          <p:nvPr/>
+        </p:nvPicPr>
+        <p:blipFill>
+          <a:blip r:embed="rId2"/>
+          <a:stretch>
+            <a:fillRect/>
+          </a:stretch>
+        </p:blipFill>
+        <p:spPr>
+          <a:xfrm>
+            <a:off x="1132921" y="1371600"/>
+            <a:ext cx="9925853" cy="4663440"/>
+          </a:xfrm>
+          <a:prstGeom prst="rect">
+            <a:avLst/>
+          </a:prstGeom>
+        </p:spPr>
+      </p:pic>
+      <p:sp>
+        <p:nvSpPr>
+          <p:cNvPr id="5" name="TextBox 4"/>
+          <p:cNvSpPr txBox="1"/>
+          <p:nvPr/>
+        </p:nvSpPr>
+        <p:spPr>
+          <a:xfrm>
+            <a:off x="640080" y="6172200"/>
+            <a:ext cx="10972800" cy="548640"/>
+          </a:xfrm>
+          <a:prstGeom prst="rect">
+            <a:avLst/>
+          </a:prstGeom>
+          <a:noFill/>
+        </p:spPr>
+        <p:txBody>
+          <a:bodyPr wrap="square">
+            <a:spAutoFit/>
+          </a:bodyPr>
+          <a:lstStyle/>
+          <a:p>
+            <a:pPr algn="l"/>
+            <a:r>
+              <a:rPr sz="1600" b="1">
+                <a:solidFill>
+                  <a:srgbClr val="2B6CB0"/>
+                </a:solidFill>
+              </a:rPr>
+              <a:t>Compare slide 7: there the non-bijective block separates within ten evaluations. Here almost nothing separates anywhere — root5 is the one visible exception.</a:t>
+            </a:r>
+          </a:p>
+        </p:txBody>
+      </p:sp>
+    </p:spTree>
+  </p:cSld>
+  <p:clrMapOvr>
+    <a:masterClrMapping/>
+  </p:clrMapOvr>
+</p:sld>
+</file>
+
+<file path=ppt/slides/slide15.xml><?xml version="1.0" encoding="utf-8"?>
+<p:sld xmlns:a="http://schemas.openxmlformats.org/drawingml/2006/main" xmlns:p="http://schemas.openxmlformats.org/presentationml/2006/main" xmlns:r="http://schemas.openxmlformats.org/officeDocument/2006/relationships">
+  <p:cSld>
+    <p:spTree>
+      <p:nvGrpSpPr>
+        <p:cNvPr id="1" name=""/>
+        <p:cNvGrpSpPr/>
+        <p:nvPr/>
+      </p:nvGrpSpPr>
+      <p:grpSpPr/>
+      <p:sp>
+        <p:nvSpPr>
+          <p:cNvPr id="2" name="TextBox 1"/>
+          <p:cNvSpPr txBox="1"/>
+          <p:nvPr/>
+        </p:nvSpPr>
+        <p:spPr>
+          <a:xfrm>
+            <a:off x="502920" y="274320"/>
+            <a:ext cx="11155680" cy="731520"/>
+          </a:xfrm>
+          <a:prstGeom prst="rect">
+            <a:avLst/>
+          </a:prstGeom>
+          <a:noFill/>
+        </p:spPr>
+        <p:txBody>
+          <a:bodyPr wrap="square">
+            <a:spAutoFit/>
+          </a:bodyPr>
+          <a:lstStyle/>
+          <a:p>
+            <a:pPr algn="l"/>
+            <a:r>
+              <a:rPr sz="3000" b="1">
+                <a:solidFill>
+                  <a:srgbClr val="1F3857"/>
+                </a:solidFill>
+              </a:rPr>
               <a:t>The two settings do not agree</a:t>
             </a:r>
           </a:p>
@@ -5931,7 +6076,7 @@
 </p:sld>
 </file>
 
-<file path=ppt/slides/slide15.xml><?xml version="1.0" encoding="utf-8"?>
+<file path=ppt/slides/slide16.xml><?xml version="1.0" encoding="utf-8"?>
 <p:sld xmlns:a="http://schemas.openxmlformats.org/drawingml/2006/main" xmlns:p="http://schemas.openxmlformats.org/presentationml/2006/main" xmlns:r="http://schemas.openxmlformats.org/officeDocument/2006/relationships">
   <p:cSld>
     <p:spTree>
@@ -6272,7 +6417,7 @@
 </p:sld>
 </file>
 
-<file path=ppt/slides/slide16.xml><?xml version="1.0" encoding="utf-8"?>
+<file path=ppt/slides/slide17.xml><?xml version="1.0" encoding="utf-8"?>
 <p:sld xmlns:a="http://schemas.openxmlformats.org/drawingml/2006/main" xmlns:p="http://schemas.openxmlformats.org/presentationml/2006/main" xmlns:r="http://schemas.openxmlformats.org/officeDocument/2006/relationships">
   <p:cSld>
     <p:spTree>
